--- a/figures/MAEDistribution_withinIndividVariation_FixedXiAlphaOmega.pptx
+++ b/figures/MAEDistribution_withinIndividVariation_FixedXiAlphaOmega.pptx
@@ -3158,7 +3158,7 @@
           <p:spPr>
             <a:xfrm>
               <a:off x="777081" y="1138809"/>
-              <a:ext cx="4572000" cy="5285232"/>
+              <a:ext cx="9144000" cy="2642615"/>
             </a:xfrm>
             <a:prstGeom prst="rect">
               <a:avLst/>
@@ -3193,7 +3193,7 @@
           <p:spPr>
             <a:xfrm>
               <a:off x="1177445" y="1434040"/>
-              <a:ext cx="2016229" cy="4580111"/>
+              <a:ext cx="4302229" cy="1937495"/>
             </a:xfrm>
             <a:prstGeom prst="rect">
               <a:avLst/>
@@ -3218,21 +3218,21 @@
           </p:nvSpPr>
           <p:spPr>
             <a:xfrm>
-              <a:off x="1177445" y="4834426"/>
-              <a:ext cx="2016229" cy="0"/>
-            </a:xfrm>
-            <a:custGeom>
-              <a:avLst/>
-              <a:pathLst>
-                <a:path w="2016229" h="0">
-                  <a:moveTo>
-                    <a:pt x="0" y="0"/>
-                  </a:moveTo>
-                  <a:lnTo>
-                    <a:pt x="2016229" y="0"/>
-                  </a:lnTo>
-                  <a:lnTo>
-                    <a:pt x="2016229" y="0"/>
+              <a:off x="1177445" y="2872484"/>
+              <a:ext cx="4302229" cy="0"/>
+            </a:xfrm>
+            <a:custGeom>
+              <a:avLst/>
+              <a:pathLst>
+                <a:path w="4302229" h="0">
+                  <a:moveTo>
+                    <a:pt x="0" y="0"/>
+                  </a:moveTo>
+                  <a:lnTo>
+                    <a:pt x="4302229" y="0"/>
+                  </a:lnTo>
+                  <a:lnTo>
+                    <a:pt x="4302229" y="0"/>
                   </a:lnTo>
                 </a:path>
               </a:pathLst>
@@ -3261,21 +3261,21 @@
           </p:nvSpPr>
           <p:spPr>
             <a:xfrm>
-              <a:off x="1177445" y="3446513"/>
-              <a:ext cx="2016229" cy="0"/>
-            </a:xfrm>
-            <a:custGeom>
-              <a:avLst/>
-              <a:pathLst>
-                <a:path w="2016229" h="0">
-                  <a:moveTo>
-                    <a:pt x="0" y="0"/>
-                  </a:moveTo>
-                  <a:lnTo>
-                    <a:pt x="2016229" y="0"/>
-                  </a:lnTo>
-                  <a:lnTo>
-                    <a:pt x="2016229" y="0"/>
+              <a:off x="1177445" y="2285364"/>
+              <a:ext cx="4302229" cy="0"/>
+            </a:xfrm>
+            <a:custGeom>
+              <a:avLst/>
+              <a:pathLst>
+                <a:path w="4302229" h="0">
+                  <a:moveTo>
+                    <a:pt x="0" y="0"/>
+                  </a:moveTo>
+                  <a:lnTo>
+                    <a:pt x="4302229" y="0"/>
+                  </a:lnTo>
+                  <a:lnTo>
+                    <a:pt x="4302229" y="0"/>
                   </a:lnTo>
                 </a:path>
               </a:pathLst>
@@ -3304,21 +3304,21 @@
           </p:nvSpPr>
           <p:spPr>
             <a:xfrm>
-              <a:off x="1177445" y="2058601"/>
-              <a:ext cx="2016229" cy="0"/>
-            </a:xfrm>
-            <a:custGeom>
-              <a:avLst/>
-              <a:pathLst>
-                <a:path w="2016229" h="0">
-                  <a:moveTo>
-                    <a:pt x="0" y="0"/>
-                  </a:moveTo>
-                  <a:lnTo>
-                    <a:pt x="2016229" y="0"/>
-                  </a:lnTo>
-                  <a:lnTo>
-                    <a:pt x="2016229" y="0"/>
+              <a:off x="1177445" y="1698244"/>
+              <a:ext cx="4302229" cy="0"/>
+            </a:xfrm>
+            <a:custGeom>
+              <a:avLst/>
+              <a:pathLst>
+                <a:path w="4302229" h="0">
+                  <a:moveTo>
+                    <a:pt x="0" y="0"/>
+                  </a:moveTo>
+                  <a:lnTo>
+                    <a:pt x="4302229" y="0"/>
+                  </a:lnTo>
+                  <a:lnTo>
+                    <a:pt x="4302229" y="0"/>
                   </a:lnTo>
                 </a:path>
               </a:pathLst>
@@ -3347,15 +3347,15 @@
           </p:nvSpPr>
           <p:spPr>
             <a:xfrm>
-              <a:off x="1348178" y="1434040"/>
-              <a:ext cx="0" cy="4580111"/>
-            </a:xfrm>
-            <a:custGeom>
-              <a:avLst/>
-              <a:pathLst>
-                <a:path w="0" h="4580111">
-                  <a:moveTo>
-                    <a:pt x="0" y="4580111"/>
+              <a:off x="1541754" y="1434040"/>
+              <a:ext cx="0" cy="1937495"/>
+            </a:xfrm>
+            <a:custGeom>
+              <a:avLst/>
+              <a:pathLst>
+                <a:path w="0" h="1937495">
+                  <a:moveTo>
+                    <a:pt x="0" y="1937495"/>
                   </a:moveTo>
                   <a:lnTo>
                     <a:pt x="0" y="0"/>
@@ -3390,15 +3390,15 @@
           </p:nvSpPr>
           <p:spPr>
             <a:xfrm>
-              <a:off x="1813390" y="1434040"/>
-              <a:ext cx="0" cy="4580111"/>
-            </a:xfrm>
-            <a:custGeom>
-              <a:avLst/>
-              <a:pathLst>
-                <a:path w="0" h="4580111">
-                  <a:moveTo>
-                    <a:pt x="0" y="4580111"/>
+              <a:off x="2534424" y="1434040"/>
+              <a:ext cx="0" cy="1937495"/>
+            </a:xfrm>
+            <a:custGeom>
+              <a:avLst/>
+              <a:pathLst>
+                <a:path w="0" h="1937495">
+                  <a:moveTo>
+                    <a:pt x="0" y="1937495"/>
                   </a:moveTo>
                   <a:lnTo>
                     <a:pt x="0" y="0"/>
@@ -3433,15 +3433,15 @@
           </p:nvSpPr>
           <p:spPr>
             <a:xfrm>
-              <a:off x="2278602" y="1434040"/>
-              <a:ext cx="0" cy="4580111"/>
-            </a:xfrm>
-            <a:custGeom>
-              <a:avLst/>
-              <a:pathLst>
-                <a:path w="0" h="4580111">
-                  <a:moveTo>
-                    <a:pt x="0" y="4580111"/>
+              <a:off x="3527093" y="1434040"/>
+              <a:ext cx="0" cy="1937495"/>
+            </a:xfrm>
+            <a:custGeom>
+              <a:avLst/>
+              <a:pathLst>
+                <a:path w="0" h="1937495">
+                  <a:moveTo>
+                    <a:pt x="0" y="1937495"/>
                   </a:moveTo>
                   <a:lnTo>
                     <a:pt x="0" y="0"/>
@@ -3476,15 +3476,15 @@
           </p:nvSpPr>
           <p:spPr>
             <a:xfrm>
-              <a:off x="2743814" y="1434040"/>
-              <a:ext cx="0" cy="4580111"/>
-            </a:xfrm>
-            <a:custGeom>
-              <a:avLst/>
-              <a:pathLst>
-                <a:path w="0" h="4580111">
-                  <a:moveTo>
-                    <a:pt x="0" y="4580111"/>
+              <a:off x="4519763" y="1434040"/>
+              <a:ext cx="0" cy="1937495"/>
+            </a:xfrm>
+            <a:custGeom>
+              <a:avLst/>
+              <a:pathLst>
+                <a:path w="0" h="1937495">
+                  <a:moveTo>
+                    <a:pt x="0" y="1937495"/>
                   </a:moveTo>
                   <a:lnTo>
                     <a:pt x="0" y="0"/>
@@ -3519,21 +3519,21 @@
           </p:nvSpPr>
           <p:spPr>
             <a:xfrm>
-              <a:off x="1177445" y="5528382"/>
-              <a:ext cx="2016229" cy="0"/>
-            </a:xfrm>
-            <a:custGeom>
-              <a:avLst/>
-              <a:pathLst>
-                <a:path w="2016229" h="0">
-                  <a:moveTo>
-                    <a:pt x="0" y="0"/>
-                  </a:moveTo>
-                  <a:lnTo>
-                    <a:pt x="2016229" y="0"/>
-                  </a:lnTo>
-                  <a:lnTo>
-                    <a:pt x="2016229" y="0"/>
+              <a:off x="1177445" y="3166044"/>
+              <a:ext cx="4302229" cy="0"/>
+            </a:xfrm>
+            <a:custGeom>
+              <a:avLst/>
+              <a:pathLst>
+                <a:path w="4302229" h="0">
+                  <a:moveTo>
+                    <a:pt x="0" y="0"/>
+                  </a:moveTo>
+                  <a:lnTo>
+                    <a:pt x="4302229" y="0"/>
+                  </a:lnTo>
+                  <a:lnTo>
+                    <a:pt x="4302229" y="0"/>
                   </a:lnTo>
                 </a:path>
               </a:pathLst>
@@ -3562,21 +3562,21 @@
           </p:nvSpPr>
           <p:spPr>
             <a:xfrm>
-              <a:off x="1177445" y="4140470"/>
-              <a:ext cx="2016229" cy="0"/>
-            </a:xfrm>
-            <a:custGeom>
-              <a:avLst/>
-              <a:pathLst>
-                <a:path w="2016229" h="0">
-                  <a:moveTo>
-                    <a:pt x="0" y="0"/>
-                  </a:moveTo>
-                  <a:lnTo>
-                    <a:pt x="2016229" y="0"/>
-                  </a:lnTo>
-                  <a:lnTo>
-                    <a:pt x="2016229" y="0"/>
+              <a:off x="1177445" y="2578924"/>
+              <a:ext cx="4302229" cy="0"/>
+            </a:xfrm>
+            <a:custGeom>
+              <a:avLst/>
+              <a:pathLst>
+                <a:path w="4302229" h="0">
+                  <a:moveTo>
+                    <a:pt x="0" y="0"/>
+                  </a:moveTo>
+                  <a:lnTo>
+                    <a:pt x="4302229" y="0"/>
+                  </a:lnTo>
+                  <a:lnTo>
+                    <a:pt x="4302229" y="0"/>
                   </a:lnTo>
                 </a:path>
               </a:pathLst>
@@ -3605,21 +3605,21 @@
           </p:nvSpPr>
           <p:spPr>
             <a:xfrm>
-              <a:off x="1177445" y="2752557"/>
-              <a:ext cx="2016229" cy="0"/>
-            </a:xfrm>
-            <a:custGeom>
-              <a:avLst/>
-              <a:pathLst>
-                <a:path w="2016229" h="0">
-                  <a:moveTo>
-                    <a:pt x="0" y="0"/>
-                  </a:moveTo>
-                  <a:lnTo>
-                    <a:pt x="2016229" y="0"/>
-                  </a:lnTo>
-                  <a:lnTo>
-                    <a:pt x="2016229" y="0"/>
+              <a:off x="1177445" y="1991804"/>
+              <a:ext cx="4302229" cy="0"/>
+            </a:xfrm>
+            <a:custGeom>
+              <a:avLst/>
+              <a:pathLst>
+                <a:path w="4302229" h="0">
+                  <a:moveTo>
+                    <a:pt x="0" y="0"/>
+                  </a:moveTo>
+                  <a:lnTo>
+                    <a:pt x="4302229" y="0"/>
+                  </a:lnTo>
+                  <a:lnTo>
+                    <a:pt x="4302229" y="0"/>
                   </a:lnTo>
                 </a:path>
               </a:pathLst>
@@ -3648,15 +3648,15 @@
           </p:nvSpPr>
           <p:spPr>
             <a:xfrm>
-              <a:off x="1580784" y="1434040"/>
-              <a:ext cx="0" cy="4580111"/>
-            </a:xfrm>
-            <a:custGeom>
-              <a:avLst/>
-              <a:pathLst>
-                <a:path w="0" h="4580111">
-                  <a:moveTo>
-                    <a:pt x="0" y="4580111"/>
+              <a:off x="2038089" y="1434040"/>
+              <a:ext cx="0" cy="1937495"/>
+            </a:xfrm>
+            <a:custGeom>
+              <a:avLst/>
+              <a:pathLst>
+                <a:path w="0" h="1937495">
+                  <a:moveTo>
+                    <a:pt x="0" y="1937495"/>
                   </a:moveTo>
                   <a:lnTo>
                     <a:pt x="0" y="0"/>
@@ -3691,15 +3691,15 @@
           </p:nvSpPr>
           <p:spPr>
             <a:xfrm>
-              <a:off x="2045996" y="1434040"/>
-              <a:ext cx="0" cy="4580111"/>
-            </a:xfrm>
-            <a:custGeom>
-              <a:avLst/>
-              <a:pathLst>
-                <a:path w="0" h="4580111">
-                  <a:moveTo>
-                    <a:pt x="0" y="4580111"/>
+              <a:off x="3030759" y="1434040"/>
+              <a:ext cx="0" cy="1937495"/>
+            </a:xfrm>
+            <a:custGeom>
+              <a:avLst/>
+              <a:pathLst>
+                <a:path w="0" h="1937495">
+                  <a:moveTo>
+                    <a:pt x="0" y="1937495"/>
                   </a:moveTo>
                   <a:lnTo>
                     <a:pt x="0" y="0"/>
@@ -3734,15 +3734,15 @@
           </p:nvSpPr>
           <p:spPr>
             <a:xfrm>
-              <a:off x="2511208" y="1434040"/>
-              <a:ext cx="0" cy="4580111"/>
-            </a:xfrm>
-            <a:custGeom>
-              <a:avLst/>
-              <a:pathLst>
-                <a:path w="0" h="4580111">
-                  <a:moveTo>
-                    <a:pt x="0" y="4580111"/>
+              <a:off x="4023428" y="1434040"/>
+              <a:ext cx="0" cy="1937495"/>
+            </a:xfrm>
+            <a:custGeom>
+              <a:avLst/>
+              <a:pathLst>
+                <a:path w="0" h="1937495">
+                  <a:moveTo>
+                    <a:pt x="0" y="1937495"/>
                   </a:moveTo>
                   <a:lnTo>
                     <a:pt x="0" y="0"/>
@@ -3777,15 +3777,15 @@
           </p:nvSpPr>
           <p:spPr>
             <a:xfrm>
-              <a:off x="2976420" y="1434040"/>
-              <a:ext cx="0" cy="4580111"/>
-            </a:xfrm>
-            <a:custGeom>
-              <a:avLst/>
-              <a:pathLst>
-                <a:path w="0" h="4580111">
-                  <a:moveTo>
-                    <a:pt x="0" y="4580111"/>
+              <a:off x="5016097" y="1434040"/>
+              <a:ext cx="0" cy="1937495"/>
+            </a:xfrm>
+            <a:custGeom>
+              <a:avLst/>
+              <a:pathLst>
+                <a:path w="0" h="1937495">
+                  <a:moveTo>
+                    <a:pt x="0" y="1937495"/>
                   </a:moveTo>
                   <a:lnTo>
                     <a:pt x="0" y="0"/>
@@ -3820,7 +3820,7 @@
           </p:nvSpPr>
           <p:spPr>
             <a:xfrm>
-              <a:off x="1369873" y="3502438"/>
+              <a:off x="1616195" y="2294698"/>
               <a:ext cx="49651" cy="49651"/>
             </a:xfrm>
             <a:prstGeom prst="ellipse">
@@ -3855,7 +3855,7 @@
           </p:nvSpPr>
           <p:spPr>
             <a:xfrm>
-              <a:off x="1742043" y="3517817"/>
+              <a:off x="2410331" y="2301203"/>
               <a:ext cx="49651" cy="49651"/>
             </a:xfrm>
             <a:prstGeom prst="ellipse">
@@ -3890,7 +3890,7 @@
           </p:nvSpPr>
           <p:spPr>
             <a:xfrm>
-              <a:off x="2021170" y="3510996"/>
+              <a:off x="3005933" y="2298318"/>
               <a:ext cx="49651" cy="49651"/>
             </a:xfrm>
             <a:prstGeom prst="ellipse">
@@ -3925,7 +3925,7 @@
           </p:nvSpPr>
           <p:spPr>
             <a:xfrm>
-              <a:off x="2486382" y="3458224"/>
+              <a:off x="3998602" y="2275994"/>
               <a:ext cx="49651" cy="49651"/>
             </a:xfrm>
             <a:prstGeom prst="ellipse">
@@ -3960,7 +3960,7 @@
           </p:nvSpPr>
           <p:spPr>
             <a:xfrm>
-              <a:off x="2951594" y="3382980"/>
+              <a:off x="4991271" y="2244164"/>
               <a:ext cx="49651" cy="49651"/>
             </a:xfrm>
             <a:prstGeom prst="ellipse">
@@ -3995,18 +3995,18 @@
           </p:nvSpPr>
           <p:spPr>
             <a:xfrm>
-              <a:off x="1269092" y="3149252"/>
-              <a:ext cx="251214" cy="0"/>
-            </a:xfrm>
-            <a:custGeom>
-              <a:avLst/>
-              <a:pathLst>
-                <a:path w="251214" h="0">
-                  <a:moveTo>
-                    <a:pt x="0" y="0"/>
-                  </a:moveTo>
-                  <a:lnTo>
-                    <a:pt x="251214" y="0"/>
+              <a:off x="1373001" y="2159615"/>
+              <a:ext cx="536041" cy="0"/>
+            </a:xfrm>
+            <a:custGeom>
+              <a:avLst/>
+              <a:pathLst>
+                <a:path w="536041" h="0">
+                  <a:moveTo>
+                    <a:pt x="0" y="0"/>
+                  </a:moveTo>
+                  <a:lnTo>
+                    <a:pt x="536041" y="0"/>
                   </a:lnTo>
                 </a:path>
               </a:pathLst>
@@ -4035,18 +4035,18 @@
           </p:nvSpPr>
           <p:spPr>
             <a:xfrm>
-              <a:off x="1394699" y="3149252"/>
-              <a:ext cx="0" cy="674239"/>
-            </a:xfrm>
-            <a:custGeom>
-              <a:avLst/>
-              <a:pathLst>
-                <a:path w="0" h="674239">
-                  <a:moveTo>
-                    <a:pt x="0" y="0"/>
-                  </a:moveTo>
-                  <a:lnTo>
-                    <a:pt x="0" y="674239"/>
+              <a:off x="1641021" y="2159615"/>
+              <a:ext cx="0" cy="285219"/>
+            </a:xfrm>
+            <a:custGeom>
+              <a:avLst/>
+              <a:pathLst>
+                <a:path w="0" h="285219">
+                  <a:moveTo>
+                    <a:pt x="0" y="0"/>
+                  </a:moveTo>
+                  <a:lnTo>
+                    <a:pt x="0" y="285219"/>
                   </a:lnTo>
                 </a:path>
               </a:pathLst>
@@ -4075,18 +4075,18 @@
           </p:nvSpPr>
           <p:spPr>
             <a:xfrm>
-              <a:off x="1269092" y="3823492"/>
-              <a:ext cx="251214" cy="0"/>
-            </a:xfrm>
-            <a:custGeom>
-              <a:avLst/>
-              <a:pathLst>
-                <a:path w="251214" h="0">
-                  <a:moveTo>
-                    <a:pt x="0" y="0"/>
-                  </a:moveTo>
-                  <a:lnTo>
-                    <a:pt x="251214" y="0"/>
+              <a:off x="1373001" y="2444835"/>
+              <a:ext cx="536041" cy="0"/>
+            </a:xfrm>
+            <a:custGeom>
+              <a:avLst/>
+              <a:pathLst>
+                <a:path w="536041" h="0">
+                  <a:moveTo>
+                    <a:pt x="0" y="0"/>
+                  </a:moveTo>
+                  <a:lnTo>
+                    <a:pt x="536041" y="0"/>
                   </a:lnTo>
                 </a:path>
               </a:pathLst>
@@ -4115,18 +4115,18 @@
           </p:nvSpPr>
           <p:spPr>
             <a:xfrm>
-              <a:off x="1641261" y="3107145"/>
-              <a:ext cx="251214" cy="0"/>
-            </a:xfrm>
-            <a:custGeom>
-              <a:avLst/>
-              <a:pathLst>
-                <a:path w="251214" h="0">
-                  <a:moveTo>
-                    <a:pt x="0" y="0"/>
-                  </a:moveTo>
-                  <a:lnTo>
-                    <a:pt x="251214" y="0"/>
+              <a:off x="2167136" y="2141803"/>
+              <a:ext cx="536041" cy="0"/>
+            </a:xfrm>
+            <a:custGeom>
+              <a:avLst/>
+              <a:pathLst>
+                <a:path w="536041" h="0">
+                  <a:moveTo>
+                    <a:pt x="0" y="0"/>
+                  </a:moveTo>
+                  <a:lnTo>
+                    <a:pt x="536041" y="0"/>
                   </a:lnTo>
                 </a:path>
               </a:pathLst>
@@ -4155,18 +4155,18 @@
           </p:nvSpPr>
           <p:spPr>
             <a:xfrm>
-              <a:off x="1766868" y="3107145"/>
-              <a:ext cx="0" cy="780040"/>
-            </a:xfrm>
-            <a:custGeom>
-              <a:avLst/>
-              <a:pathLst>
-                <a:path w="0" h="780040">
-                  <a:moveTo>
-                    <a:pt x="0" y="0"/>
-                  </a:moveTo>
-                  <a:lnTo>
-                    <a:pt x="0" y="780040"/>
+              <a:off x="2435157" y="2141803"/>
+              <a:ext cx="0" cy="329975"/>
+            </a:xfrm>
+            <a:custGeom>
+              <a:avLst/>
+              <a:pathLst>
+                <a:path w="0" h="329975">
+                  <a:moveTo>
+                    <a:pt x="0" y="0"/>
+                  </a:moveTo>
+                  <a:lnTo>
+                    <a:pt x="0" y="329975"/>
                   </a:lnTo>
                 </a:path>
               </a:pathLst>
@@ -4195,18 +4195,18 @@
           </p:nvSpPr>
           <p:spPr>
             <a:xfrm>
-              <a:off x="1641261" y="3887185"/>
-              <a:ext cx="251214" cy="0"/>
-            </a:xfrm>
-            <a:custGeom>
-              <a:avLst/>
-              <a:pathLst>
-                <a:path w="251214" h="0">
-                  <a:moveTo>
-                    <a:pt x="0" y="0"/>
-                  </a:moveTo>
-                  <a:lnTo>
-                    <a:pt x="251214" y="0"/>
+              <a:off x="2167136" y="2471779"/>
+              <a:ext cx="536041" cy="0"/>
+            </a:xfrm>
+            <a:custGeom>
+              <a:avLst/>
+              <a:pathLst>
+                <a:path w="536041" h="0">
+                  <a:moveTo>
+                    <a:pt x="0" y="0"/>
+                  </a:moveTo>
+                  <a:lnTo>
+                    <a:pt x="536041" y="0"/>
                   </a:lnTo>
                 </a:path>
               </a:pathLst>
@@ -4235,18 +4235,18 @@
           </p:nvSpPr>
           <p:spPr>
             <a:xfrm>
-              <a:off x="1920388" y="3274441"/>
-              <a:ext cx="251214" cy="0"/>
-            </a:xfrm>
-            <a:custGeom>
-              <a:avLst/>
-              <a:pathLst>
-                <a:path w="251214" h="0">
-                  <a:moveTo>
-                    <a:pt x="0" y="0"/>
-                  </a:moveTo>
-                  <a:lnTo>
-                    <a:pt x="251214" y="0"/>
+              <a:off x="2762738" y="2212573"/>
+              <a:ext cx="536041" cy="0"/>
+            </a:xfrm>
+            <a:custGeom>
+              <a:avLst/>
+              <a:pathLst>
+                <a:path w="536041" h="0">
+                  <a:moveTo>
+                    <a:pt x="0" y="0"/>
+                  </a:moveTo>
+                  <a:lnTo>
+                    <a:pt x="536041" y="0"/>
                   </a:lnTo>
                 </a:path>
               </a:pathLst>
@@ -4275,18 +4275,18 @@
           </p:nvSpPr>
           <p:spPr>
             <a:xfrm>
-              <a:off x="2045996" y="3274441"/>
-              <a:ext cx="0" cy="455802"/>
-            </a:xfrm>
-            <a:custGeom>
-              <a:avLst/>
-              <a:pathLst>
-                <a:path w="0" h="455802">
-                  <a:moveTo>
-                    <a:pt x="0" y="0"/>
-                  </a:moveTo>
-                  <a:lnTo>
-                    <a:pt x="0" y="455802"/>
+              <a:off x="3030759" y="2212573"/>
+              <a:ext cx="0" cy="192815"/>
+            </a:xfrm>
+            <a:custGeom>
+              <a:avLst/>
+              <a:pathLst>
+                <a:path w="0" h="192815">
+                  <a:moveTo>
+                    <a:pt x="0" y="0"/>
+                  </a:moveTo>
+                  <a:lnTo>
+                    <a:pt x="0" y="192815"/>
                   </a:lnTo>
                 </a:path>
               </a:pathLst>
@@ -4315,18 +4315,18 @@
           </p:nvSpPr>
           <p:spPr>
             <a:xfrm>
-              <a:off x="1920388" y="3730243"/>
-              <a:ext cx="251214" cy="0"/>
-            </a:xfrm>
-            <a:custGeom>
-              <a:avLst/>
-              <a:pathLst>
-                <a:path w="251214" h="0">
-                  <a:moveTo>
-                    <a:pt x="0" y="0"/>
-                  </a:moveTo>
-                  <a:lnTo>
-                    <a:pt x="251214" y="0"/>
+              <a:off x="2762738" y="2405388"/>
+              <a:ext cx="536041" cy="0"/>
+            </a:xfrm>
+            <a:custGeom>
+              <a:avLst/>
+              <a:pathLst>
+                <a:path w="536041" h="0">
+                  <a:moveTo>
+                    <a:pt x="0" y="0"/>
+                  </a:moveTo>
+                  <a:lnTo>
+                    <a:pt x="536041" y="0"/>
                   </a:lnTo>
                 </a:path>
               </a:pathLst>
@@ -4355,18 +4355,18 @@
           </p:nvSpPr>
           <p:spPr>
             <a:xfrm>
-              <a:off x="2385601" y="3098764"/>
-              <a:ext cx="251214" cy="0"/>
-            </a:xfrm>
-            <a:custGeom>
-              <a:avLst/>
-              <a:pathLst>
-                <a:path w="251214" h="0">
-                  <a:moveTo>
-                    <a:pt x="0" y="0"/>
-                  </a:moveTo>
-                  <a:lnTo>
-                    <a:pt x="251214" y="0"/>
+              <a:off x="3755407" y="2138257"/>
+              <a:ext cx="536041" cy="0"/>
+            </a:xfrm>
+            <a:custGeom>
+              <a:avLst/>
+              <a:pathLst>
+                <a:path w="536041" h="0">
+                  <a:moveTo>
+                    <a:pt x="0" y="0"/>
+                  </a:moveTo>
+                  <a:lnTo>
+                    <a:pt x="536041" y="0"/>
                   </a:lnTo>
                 </a:path>
               </a:pathLst>
@@ -4395,18 +4395,18 @@
           </p:nvSpPr>
           <p:spPr>
             <a:xfrm>
-              <a:off x="2511208" y="3098764"/>
-              <a:ext cx="0" cy="666838"/>
-            </a:xfrm>
-            <a:custGeom>
-              <a:avLst/>
-              <a:pathLst>
-                <a:path w="0" h="666838">
-                  <a:moveTo>
-                    <a:pt x="0" y="0"/>
-                  </a:moveTo>
-                  <a:lnTo>
-                    <a:pt x="0" y="666838"/>
+              <a:off x="4023428" y="2138257"/>
+              <a:ext cx="0" cy="282088"/>
+            </a:xfrm>
+            <a:custGeom>
+              <a:avLst/>
+              <a:pathLst>
+                <a:path w="0" h="282088">
+                  <a:moveTo>
+                    <a:pt x="0" y="0"/>
+                  </a:moveTo>
+                  <a:lnTo>
+                    <a:pt x="0" y="282088"/>
                   </a:lnTo>
                 </a:path>
               </a:pathLst>
@@ -4435,18 +4435,18 @@
           </p:nvSpPr>
           <p:spPr>
             <a:xfrm>
-              <a:off x="2385601" y="3765602"/>
-              <a:ext cx="251214" cy="0"/>
-            </a:xfrm>
-            <a:custGeom>
-              <a:avLst/>
-              <a:pathLst>
-                <a:path w="251214" h="0">
-                  <a:moveTo>
-                    <a:pt x="0" y="0"/>
-                  </a:moveTo>
-                  <a:lnTo>
-                    <a:pt x="251214" y="0"/>
+              <a:off x="3755407" y="2420346"/>
+              <a:ext cx="536041" cy="0"/>
+            </a:xfrm>
+            <a:custGeom>
+              <a:avLst/>
+              <a:pathLst>
+                <a:path w="536041" h="0">
+                  <a:moveTo>
+                    <a:pt x="0" y="0"/>
+                  </a:moveTo>
+                  <a:lnTo>
+                    <a:pt x="536041" y="0"/>
                   </a:lnTo>
                 </a:path>
               </a:pathLst>
@@ -4475,18 +4475,18 @@
           </p:nvSpPr>
           <p:spPr>
             <a:xfrm>
-              <a:off x="2850813" y="2894567"/>
-              <a:ext cx="251214" cy="0"/>
-            </a:xfrm>
-            <a:custGeom>
-              <a:avLst/>
-              <a:pathLst>
-                <a:path w="251214" h="0">
-                  <a:moveTo>
-                    <a:pt x="0" y="0"/>
-                  </a:moveTo>
-                  <a:lnTo>
-                    <a:pt x="251214" y="0"/>
+              <a:off x="4748077" y="2051877"/>
+              <a:ext cx="536041" cy="0"/>
+            </a:xfrm>
+            <a:custGeom>
+              <a:avLst/>
+              <a:pathLst>
+                <a:path w="536041" h="0">
+                  <a:moveTo>
+                    <a:pt x="0" y="0"/>
+                  </a:moveTo>
+                  <a:lnTo>
+                    <a:pt x="536041" y="0"/>
                   </a:lnTo>
                 </a:path>
               </a:pathLst>
@@ -4515,18 +4515,18 @@
           </p:nvSpPr>
           <p:spPr>
             <a:xfrm>
-              <a:off x="2976420" y="2894567"/>
-              <a:ext cx="0" cy="867885"/>
-            </a:xfrm>
-            <a:custGeom>
-              <a:avLst/>
-              <a:pathLst>
-                <a:path w="0" h="867885">
-                  <a:moveTo>
-                    <a:pt x="0" y="0"/>
-                  </a:moveTo>
-                  <a:lnTo>
-                    <a:pt x="0" y="867885"/>
+              <a:off x="5016097" y="2051877"/>
+              <a:ext cx="0" cy="367135"/>
+            </a:xfrm>
+            <a:custGeom>
+              <a:avLst/>
+              <a:pathLst>
+                <a:path w="0" h="367135">
+                  <a:moveTo>
+                    <a:pt x="0" y="0"/>
+                  </a:moveTo>
+                  <a:lnTo>
+                    <a:pt x="0" y="367135"/>
                   </a:lnTo>
                 </a:path>
               </a:pathLst>
@@ -4555,18 +4555,18 @@
           </p:nvSpPr>
           <p:spPr>
             <a:xfrm>
-              <a:off x="2850813" y="3762452"/>
-              <a:ext cx="251214" cy="0"/>
-            </a:xfrm>
-            <a:custGeom>
-              <a:avLst/>
-              <a:pathLst>
-                <a:path w="251214" h="0">
-                  <a:moveTo>
-                    <a:pt x="0" y="0"/>
-                  </a:moveTo>
-                  <a:lnTo>
-                    <a:pt x="251214" y="0"/>
+              <a:off x="4748077" y="2419013"/>
+              <a:ext cx="536041" cy="0"/>
+            </a:xfrm>
+            <a:custGeom>
+              <a:avLst/>
+              <a:pathLst>
+                <a:path w="536041" h="0">
+                  <a:moveTo>
+                    <a:pt x="0" y="0"/>
+                  </a:moveTo>
+                  <a:lnTo>
+                    <a:pt x="536041" y="0"/>
                   </a:lnTo>
                 </a:path>
               </a:pathLst>
@@ -4595,21 +4595,21 @@
           </p:nvSpPr>
           <p:spPr>
             <a:xfrm>
-              <a:off x="1177445" y="3585305"/>
-              <a:ext cx="2016229" cy="0"/>
-            </a:xfrm>
-            <a:custGeom>
-              <a:avLst/>
-              <a:pathLst>
-                <a:path w="2016229" h="0">
-                  <a:moveTo>
-                    <a:pt x="0" y="0"/>
-                  </a:moveTo>
-                  <a:lnTo>
-                    <a:pt x="2016229" y="0"/>
-                  </a:lnTo>
-                  <a:lnTo>
-                    <a:pt x="2016229" y="0"/>
+              <a:off x="1177445" y="2332333"/>
+              <a:ext cx="4302229" cy="0"/>
+            </a:xfrm>
+            <a:custGeom>
+              <a:avLst/>
+              <a:pathLst>
+                <a:path w="4302229" h="0">
+                  <a:moveTo>
+                    <a:pt x="0" y="0"/>
+                  </a:moveTo>
+                  <a:lnTo>
+                    <a:pt x="4302229" y="0"/>
+                  </a:lnTo>
+                  <a:lnTo>
+                    <a:pt x="4302229" y="0"/>
                   </a:lnTo>
                 </a:path>
               </a:pathLst>
@@ -4632,14 +4632,100 @@
         </p:sp>
         <p:sp>
           <p:nvSpPr>
-            <p:cNvPr id="41" name="rc41"/>
+            <p:cNvPr id="41" name="pl41"/>
+            <p:cNvSpPr/>
+            <p:nvPr/>
+          </p:nvSpPr>
+          <p:spPr>
+            <a:xfrm>
+              <a:off x="1177445" y="2085743"/>
+              <a:ext cx="4302229" cy="0"/>
+            </a:xfrm>
+            <a:custGeom>
+              <a:avLst/>
+              <a:pathLst>
+                <a:path w="4302229" h="0">
+                  <a:moveTo>
+                    <a:pt x="0" y="0"/>
+                  </a:moveTo>
+                  <a:lnTo>
+                    <a:pt x="4302229" y="0"/>
+                  </a:lnTo>
+                  <a:lnTo>
+                    <a:pt x="4302229" y="0"/>
+                  </a:lnTo>
+                </a:path>
+              </a:pathLst>
+            </a:custGeom>
+            <a:ln w="13550" cap="flat">
+              <a:solidFill>
+                <a:srgbClr val="B3B3B3">
+                  <a:alpha val="100000"/>
+                </a:srgbClr>
+              </a:solidFill>
+              <a:prstDash val="dash"/>
+              <a:round/>
+            </a:ln>
+          </p:spPr>
+          <p:txBody>
+            <a:bodyPr/>
+            <a:lstStyle/>
+            <a:p/>
+          </p:txBody>
+        </p:sp>
+        <p:sp>
+          <p:nvSpPr>
+            <p:cNvPr id="42" name="pl42"/>
+            <p:cNvSpPr/>
+            <p:nvPr/>
+          </p:nvSpPr>
+          <p:spPr>
+            <a:xfrm>
+              <a:off x="1177445" y="2578924"/>
+              <a:ext cx="4302229" cy="0"/>
+            </a:xfrm>
+            <a:custGeom>
+              <a:avLst/>
+              <a:pathLst>
+                <a:path w="4302229" h="0">
+                  <a:moveTo>
+                    <a:pt x="0" y="0"/>
+                  </a:moveTo>
+                  <a:lnTo>
+                    <a:pt x="4302229" y="0"/>
+                  </a:lnTo>
+                  <a:lnTo>
+                    <a:pt x="4302229" y="0"/>
+                  </a:lnTo>
+                </a:path>
+              </a:pathLst>
+            </a:custGeom>
+            <a:ln w="13550" cap="flat">
+              <a:solidFill>
+                <a:srgbClr val="B3B3B3">
+                  <a:alpha val="100000"/>
+                </a:srgbClr>
+              </a:solidFill>
+              <a:prstDash val="dash"/>
+              <a:round/>
+            </a:ln>
+          </p:spPr>
+          <p:txBody>
+            <a:bodyPr/>
+            <a:lstStyle/>
+            <a:p/>
+          </p:txBody>
+        </p:sp>
+        <p:sp>
+          <p:nvSpPr>
+            <p:cNvPr id="43" name="rc43"/>
             <p:cNvSpPr/>
             <p:nvPr/>
           </p:nvSpPr>
           <p:spPr>
             <a:xfrm>
               <a:off x="1177445" y="1434040"/>
-              <a:ext cx="2016229" cy="4580111"/>
+              <a:ext cx="4302229" cy="1937495"/>
             </a:xfrm>
             <a:prstGeom prst="rect">
               <a:avLst/>
@@ -4662,14 +4748,14 @@
         </p:sp>
         <p:sp>
           <p:nvSpPr>
-            <p:cNvPr id="42" name="rc42"/>
-            <p:cNvSpPr/>
-            <p:nvPr/>
-          </p:nvSpPr>
-          <p:spPr>
-            <a:xfrm>
-              <a:off x="3263263" y="1434040"/>
-              <a:ext cx="2016229" cy="4580111"/>
+            <p:cNvPr id="44" name="rc44"/>
+            <p:cNvSpPr/>
+            <p:nvPr/>
+          </p:nvSpPr>
+          <p:spPr>
+            <a:xfrm>
+              <a:off x="5549263" y="1434040"/>
+              <a:ext cx="4302229" cy="1937495"/>
             </a:xfrm>
             <a:prstGeom prst="rect">
               <a:avLst/>
@@ -4688,27 +4774,27 @@
         </p:sp>
         <p:sp>
           <p:nvSpPr>
-            <p:cNvPr id="43" name="pl43"/>
-            <p:cNvSpPr/>
-            <p:nvPr/>
-          </p:nvSpPr>
-          <p:spPr>
-            <a:xfrm>
-              <a:off x="3263263" y="4834426"/>
-              <a:ext cx="2016229" cy="0"/>
-            </a:xfrm>
-            <a:custGeom>
-              <a:avLst/>
-              <a:pathLst>
-                <a:path w="2016229" h="0">
-                  <a:moveTo>
-                    <a:pt x="0" y="0"/>
-                  </a:moveTo>
-                  <a:lnTo>
-                    <a:pt x="2016229" y="0"/>
-                  </a:lnTo>
-                  <a:lnTo>
-                    <a:pt x="2016229" y="0"/>
+            <p:cNvPr id="45" name="pl45"/>
+            <p:cNvSpPr/>
+            <p:nvPr/>
+          </p:nvSpPr>
+          <p:spPr>
+            <a:xfrm>
+              <a:off x="5549263" y="2872484"/>
+              <a:ext cx="4302229" cy="0"/>
+            </a:xfrm>
+            <a:custGeom>
+              <a:avLst/>
+              <a:pathLst>
+                <a:path w="4302229" h="0">
+                  <a:moveTo>
+                    <a:pt x="0" y="0"/>
+                  </a:moveTo>
+                  <a:lnTo>
+                    <a:pt x="4302229" y="0"/>
+                  </a:lnTo>
+                  <a:lnTo>
+                    <a:pt x="4302229" y="0"/>
                   </a:lnTo>
                 </a:path>
               </a:pathLst>
@@ -4731,27 +4817,27 @@
         </p:sp>
         <p:sp>
           <p:nvSpPr>
-            <p:cNvPr id="44" name="pl44"/>
-            <p:cNvSpPr/>
-            <p:nvPr/>
-          </p:nvSpPr>
-          <p:spPr>
-            <a:xfrm>
-              <a:off x="3263263" y="3446513"/>
-              <a:ext cx="2016229" cy="0"/>
-            </a:xfrm>
-            <a:custGeom>
-              <a:avLst/>
-              <a:pathLst>
-                <a:path w="2016229" h="0">
-                  <a:moveTo>
-                    <a:pt x="0" y="0"/>
-                  </a:moveTo>
-                  <a:lnTo>
-                    <a:pt x="2016229" y="0"/>
-                  </a:lnTo>
-                  <a:lnTo>
-                    <a:pt x="2016229" y="0"/>
+            <p:cNvPr id="46" name="pl46"/>
+            <p:cNvSpPr/>
+            <p:nvPr/>
+          </p:nvSpPr>
+          <p:spPr>
+            <a:xfrm>
+              <a:off x="5549263" y="2285364"/>
+              <a:ext cx="4302229" cy="0"/>
+            </a:xfrm>
+            <a:custGeom>
+              <a:avLst/>
+              <a:pathLst>
+                <a:path w="4302229" h="0">
+                  <a:moveTo>
+                    <a:pt x="0" y="0"/>
+                  </a:moveTo>
+                  <a:lnTo>
+                    <a:pt x="4302229" y="0"/>
+                  </a:lnTo>
+                  <a:lnTo>
+                    <a:pt x="4302229" y="0"/>
                   </a:lnTo>
                 </a:path>
               </a:pathLst>
@@ -4774,27 +4860,27 @@
         </p:sp>
         <p:sp>
           <p:nvSpPr>
-            <p:cNvPr id="45" name="pl45"/>
-            <p:cNvSpPr/>
-            <p:nvPr/>
-          </p:nvSpPr>
-          <p:spPr>
-            <a:xfrm>
-              <a:off x="3263263" y="2058601"/>
-              <a:ext cx="2016229" cy="0"/>
-            </a:xfrm>
-            <a:custGeom>
-              <a:avLst/>
-              <a:pathLst>
-                <a:path w="2016229" h="0">
-                  <a:moveTo>
-                    <a:pt x="0" y="0"/>
-                  </a:moveTo>
-                  <a:lnTo>
-                    <a:pt x="2016229" y="0"/>
-                  </a:lnTo>
-                  <a:lnTo>
-                    <a:pt x="2016229" y="0"/>
+            <p:cNvPr id="47" name="pl47"/>
+            <p:cNvSpPr/>
+            <p:nvPr/>
+          </p:nvSpPr>
+          <p:spPr>
+            <a:xfrm>
+              <a:off x="5549263" y="1698244"/>
+              <a:ext cx="4302229" cy="0"/>
+            </a:xfrm>
+            <a:custGeom>
+              <a:avLst/>
+              <a:pathLst>
+                <a:path w="4302229" h="0">
+                  <a:moveTo>
+                    <a:pt x="0" y="0"/>
+                  </a:moveTo>
+                  <a:lnTo>
+                    <a:pt x="4302229" y="0"/>
+                  </a:lnTo>
+                  <a:lnTo>
+                    <a:pt x="4302229" y="0"/>
                   </a:lnTo>
                 </a:path>
               </a:pathLst>
@@ -4817,21 +4903,21 @@
         </p:sp>
         <p:sp>
           <p:nvSpPr>
-            <p:cNvPr id="46" name="pl46"/>
-            <p:cNvSpPr/>
-            <p:nvPr/>
-          </p:nvSpPr>
-          <p:spPr>
-            <a:xfrm>
-              <a:off x="3433996" y="1434040"/>
-              <a:ext cx="0" cy="4580111"/>
-            </a:xfrm>
-            <a:custGeom>
-              <a:avLst/>
-              <a:pathLst>
-                <a:path w="0" h="4580111">
-                  <a:moveTo>
-                    <a:pt x="0" y="4580111"/>
+            <p:cNvPr id="48" name="pl48"/>
+            <p:cNvSpPr/>
+            <p:nvPr/>
+          </p:nvSpPr>
+          <p:spPr>
+            <a:xfrm>
+              <a:off x="5913573" y="1434040"/>
+              <a:ext cx="0" cy="1937495"/>
+            </a:xfrm>
+            <a:custGeom>
+              <a:avLst/>
+              <a:pathLst>
+                <a:path w="0" h="1937495">
+                  <a:moveTo>
+                    <a:pt x="0" y="1937495"/>
                   </a:moveTo>
                   <a:lnTo>
                     <a:pt x="0" y="0"/>
@@ -4860,21 +4946,21 @@
         </p:sp>
         <p:sp>
           <p:nvSpPr>
-            <p:cNvPr id="47" name="pl47"/>
-            <p:cNvSpPr/>
-            <p:nvPr/>
-          </p:nvSpPr>
-          <p:spPr>
-            <a:xfrm>
-              <a:off x="3899208" y="1434040"/>
-              <a:ext cx="0" cy="4580111"/>
-            </a:xfrm>
-            <a:custGeom>
-              <a:avLst/>
-              <a:pathLst>
-                <a:path w="0" h="4580111">
-                  <a:moveTo>
-                    <a:pt x="0" y="4580111"/>
+            <p:cNvPr id="49" name="pl49"/>
+            <p:cNvSpPr/>
+            <p:nvPr/>
+          </p:nvSpPr>
+          <p:spPr>
+            <a:xfrm>
+              <a:off x="6906242" y="1434040"/>
+              <a:ext cx="0" cy="1937495"/>
+            </a:xfrm>
+            <a:custGeom>
+              <a:avLst/>
+              <a:pathLst>
+                <a:path w="0" h="1937495">
+                  <a:moveTo>
+                    <a:pt x="0" y="1937495"/>
                   </a:moveTo>
                   <a:lnTo>
                     <a:pt x="0" y="0"/>
@@ -4903,21 +4989,21 @@
         </p:sp>
         <p:sp>
           <p:nvSpPr>
-            <p:cNvPr id="48" name="pl48"/>
-            <p:cNvSpPr/>
-            <p:nvPr/>
-          </p:nvSpPr>
-          <p:spPr>
-            <a:xfrm>
-              <a:off x="4364420" y="1434040"/>
-              <a:ext cx="0" cy="4580111"/>
-            </a:xfrm>
-            <a:custGeom>
-              <a:avLst/>
-              <a:pathLst>
-                <a:path w="0" h="4580111">
-                  <a:moveTo>
-                    <a:pt x="0" y="4580111"/>
+            <p:cNvPr id="50" name="pl50"/>
+            <p:cNvSpPr/>
+            <p:nvPr/>
+          </p:nvSpPr>
+          <p:spPr>
+            <a:xfrm>
+              <a:off x="7898911" y="1434040"/>
+              <a:ext cx="0" cy="1937495"/>
+            </a:xfrm>
+            <a:custGeom>
+              <a:avLst/>
+              <a:pathLst>
+                <a:path w="0" h="1937495">
+                  <a:moveTo>
+                    <a:pt x="0" y="1937495"/>
                   </a:moveTo>
                   <a:lnTo>
                     <a:pt x="0" y="0"/>
@@ -4946,21 +5032,21 @@
         </p:sp>
         <p:sp>
           <p:nvSpPr>
-            <p:cNvPr id="49" name="pl49"/>
-            <p:cNvSpPr/>
-            <p:nvPr/>
-          </p:nvSpPr>
-          <p:spPr>
-            <a:xfrm>
-              <a:off x="4829632" y="1434040"/>
-              <a:ext cx="0" cy="4580111"/>
-            </a:xfrm>
-            <a:custGeom>
-              <a:avLst/>
-              <a:pathLst>
-                <a:path w="0" h="4580111">
-                  <a:moveTo>
-                    <a:pt x="0" y="4580111"/>
+            <p:cNvPr id="51" name="pl51"/>
+            <p:cNvSpPr/>
+            <p:nvPr/>
+          </p:nvSpPr>
+          <p:spPr>
+            <a:xfrm>
+              <a:off x="8891581" y="1434040"/>
+              <a:ext cx="0" cy="1937495"/>
+            </a:xfrm>
+            <a:custGeom>
+              <a:avLst/>
+              <a:pathLst>
+                <a:path w="0" h="1937495">
+                  <a:moveTo>
+                    <a:pt x="0" y="1937495"/>
                   </a:moveTo>
                   <a:lnTo>
                     <a:pt x="0" y="0"/>
@@ -4989,27 +5075,27 @@
         </p:sp>
         <p:sp>
           <p:nvSpPr>
-            <p:cNvPr id="50" name="pl50"/>
-            <p:cNvSpPr/>
-            <p:nvPr/>
-          </p:nvSpPr>
-          <p:spPr>
-            <a:xfrm>
-              <a:off x="3263263" y="5528382"/>
-              <a:ext cx="2016229" cy="0"/>
-            </a:xfrm>
-            <a:custGeom>
-              <a:avLst/>
-              <a:pathLst>
-                <a:path w="2016229" h="0">
-                  <a:moveTo>
-                    <a:pt x="0" y="0"/>
-                  </a:moveTo>
-                  <a:lnTo>
-                    <a:pt x="2016229" y="0"/>
-                  </a:lnTo>
-                  <a:lnTo>
-                    <a:pt x="2016229" y="0"/>
+            <p:cNvPr id="52" name="pl52"/>
+            <p:cNvSpPr/>
+            <p:nvPr/>
+          </p:nvSpPr>
+          <p:spPr>
+            <a:xfrm>
+              <a:off x="5549263" y="3166044"/>
+              <a:ext cx="4302229" cy="0"/>
+            </a:xfrm>
+            <a:custGeom>
+              <a:avLst/>
+              <a:pathLst>
+                <a:path w="4302229" h="0">
+                  <a:moveTo>
+                    <a:pt x="0" y="0"/>
+                  </a:moveTo>
+                  <a:lnTo>
+                    <a:pt x="4302229" y="0"/>
+                  </a:lnTo>
+                  <a:lnTo>
+                    <a:pt x="4302229" y="0"/>
                   </a:lnTo>
                 </a:path>
               </a:pathLst>
@@ -5032,27 +5118,27 @@
         </p:sp>
         <p:sp>
           <p:nvSpPr>
-            <p:cNvPr id="51" name="pl51"/>
-            <p:cNvSpPr/>
-            <p:nvPr/>
-          </p:nvSpPr>
-          <p:spPr>
-            <a:xfrm>
-              <a:off x="3263263" y="4140470"/>
-              <a:ext cx="2016229" cy="0"/>
-            </a:xfrm>
-            <a:custGeom>
-              <a:avLst/>
-              <a:pathLst>
-                <a:path w="2016229" h="0">
-                  <a:moveTo>
-                    <a:pt x="0" y="0"/>
-                  </a:moveTo>
-                  <a:lnTo>
-                    <a:pt x="2016229" y="0"/>
-                  </a:lnTo>
-                  <a:lnTo>
-                    <a:pt x="2016229" y="0"/>
+            <p:cNvPr id="53" name="pl53"/>
+            <p:cNvSpPr/>
+            <p:nvPr/>
+          </p:nvSpPr>
+          <p:spPr>
+            <a:xfrm>
+              <a:off x="5549263" y="2578924"/>
+              <a:ext cx="4302229" cy="0"/>
+            </a:xfrm>
+            <a:custGeom>
+              <a:avLst/>
+              <a:pathLst>
+                <a:path w="4302229" h="0">
+                  <a:moveTo>
+                    <a:pt x="0" y="0"/>
+                  </a:moveTo>
+                  <a:lnTo>
+                    <a:pt x="4302229" y="0"/>
+                  </a:lnTo>
+                  <a:lnTo>
+                    <a:pt x="4302229" y="0"/>
                   </a:lnTo>
                 </a:path>
               </a:pathLst>
@@ -5075,27 +5161,27 @@
         </p:sp>
         <p:sp>
           <p:nvSpPr>
-            <p:cNvPr id="52" name="pl52"/>
-            <p:cNvSpPr/>
-            <p:nvPr/>
-          </p:nvSpPr>
-          <p:spPr>
-            <a:xfrm>
-              <a:off x="3263263" y="2752557"/>
-              <a:ext cx="2016229" cy="0"/>
-            </a:xfrm>
-            <a:custGeom>
-              <a:avLst/>
-              <a:pathLst>
-                <a:path w="2016229" h="0">
-                  <a:moveTo>
-                    <a:pt x="0" y="0"/>
-                  </a:moveTo>
-                  <a:lnTo>
-                    <a:pt x="2016229" y="0"/>
-                  </a:lnTo>
-                  <a:lnTo>
-                    <a:pt x="2016229" y="0"/>
+            <p:cNvPr id="54" name="pl54"/>
+            <p:cNvSpPr/>
+            <p:nvPr/>
+          </p:nvSpPr>
+          <p:spPr>
+            <a:xfrm>
+              <a:off x="5549263" y="1991804"/>
+              <a:ext cx="4302229" cy="0"/>
+            </a:xfrm>
+            <a:custGeom>
+              <a:avLst/>
+              <a:pathLst>
+                <a:path w="4302229" h="0">
+                  <a:moveTo>
+                    <a:pt x="0" y="0"/>
+                  </a:moveTo>
+                  <a:lnTo>
+                    <a:pt x="4302229" y="0"/>
+                  </a:lnTo>
+                  <a:lnTo>
+                    <a:pt x="4302229" y="0"/>
                   </a:lnTo>
                 </a:path>
               </a:pathLst>
@@ -5118,21 +5204,21 @@
         </p:sp>
         <p:sp>
           <p:nvSpPr>
-            <p:cNvPr id="53" name="pl53"/>
-            <p:cNvSpPr/>
-            <p:nvPr/>
-          </p:nvSpPr>
-          <p:spPr>
-            <a:xfrm>
-              <a:off x="3666602" y="1434040"/>
-              <a:ext cx="0" cy="4580111"/>
-            </a:xfrm>
-            <a:custGeom>
-              <a:avLst/>
-              <a:pathLst>
-                <a:path w="0" h="4580111">
-                  <a:moveTo>
-                    <a:pt x="0" y="4580111"/>
+            <p:cNvPr id="55" name="pl55"/>
+            <p:cNvSpPr/>
+            <p:nvPr/>
+          </p:nvSpPr>
+          <p:spPr>
+            <a:xfrm>
+              <a:off x="6409907" y="1434040"/>
+              <a:ext cx="0" cy="1937495"/>
+            </a:xfrm>
+            <a:custGeom>
+              <a:avLst/>
+              <a:pathLst>
+                <a:path w="0" h="1937495">
+                  <a:moveTo>
+                    <a:pt x="0" y="1937495"/>
                   </a:moveTo>
                   <a:lnTo>
                     <a:pt x="0" y="0"/>
@@ -5161,21 +5247,21 @@
         </p:sp>
         <p:sp>
           <p:nvSpPr>
-            <p:cNvPr id="54" name="pl54"/>
-            <p:cNvSpPr/>
-            <p:nvPr/>
-          </p:nvSpPr>
-          <p:spPr>
-            <a:xfrm>
-              <a:off x="4131814" y="1434040"/>
-              <a:ext cx="0" cy="4580111"/>
-            </a:xfrm>
-            <a:custGeom>
-              <a:avLst/>
-              <a:pathLst>
-                <a:path w="0" h="4580111">
-                  <a:moveTo>
-                    <a:pt x="0" y="4580111"/>
+            <p:cNvPr id="56" name="pl56"/>
+            <p:cNvSpPr/>
+            <p:nvPr/>
+          </p:nvSpPr>
+          <p:spPr>
+            <a:xfrm>
+              <a:off x="7402577" y="1434040"/>
+              <a:ext cx="0" cy="1937495"/>
+            </a:xfrm>
+            <a:custGeom>
+              <a:avLst/>
+              <a:pathLst>
+                <a:path w="0" h="1937495">
+                  <a:moveTo>
+                    <a:pt x="0" y="1937495"/>
                   </a:moveTo>
                   <a:lnTo>
                     <a:pt x="0" y="0"/>
@@ -5204,21 +5290,21 @@
         </p:sp>
         <p:sp>
           <p:nvSpPr>
-            <p:cNvPr id="55" name="pl55"/>
-            <p:cNvSpPr/>
-            <p:nvPr/>
-          </p:nvSpPr>
-          <p:spPr>
-            <a:xfrm>
-              <a:off x="4597026" y="1434040"/>
-              <a:ext cx="0" cy="4580111"/>
-            </a:xfrm>
-            <a:custGeom>
-              <a:avLst/>
-              <a:pathLst>
-                <a:path w="0" h="4580111">
-                  <a:moveTo>
-                    <a:pt x="0" y="4580111"/>
+            <p:cNvPr id="57" name="pl57"/>
+            <p:cNvSpPr/>
+            <p:nvPr/>
+          </p:nvSpPr>
+          <p:spPr>
+            <a:xfrm>
+              <a:off x="8395246" y="1434040"/>
+              <a:ext cx="0" cy="1937495"/>
+            </a:xfrm>
+            <a:custGeom>
+              <a:avLst/>
+              <a:pathLst>
+                <a:path w="0" h="1937495">
+                  <a:moveTo>
+                    <a:pt x="0" y="1937495"/>
                   </a:moveTo>
                   <a:lnTo>
                     <a:pt x="0" y="0"/>
@@ -5247,21 +5333,21 @@
         </p:sp>
         <p:sp>
           <p:nvSpPr>
-            <p:cNvPr id="56" name="pl56"/>
-            <p:cNvSpPr/>
-            <p:nvPr/>
-          </p:nvSpPr>
-          <p:spPr>
-            <a:xfrm>
-              <a:off x="5062238" y="1434040"/>
-              <a:ext cx="0" cy="4580111"/>
-            </a:xfrm>
-            <a:custGeom>
-              <a:avLst/>
-              <a:pathLst>
-                <a:path w="0" h="4580111">
-                  <a:moveTo>
-                    <a:pt x="0" y="4580111"/>
+            <p:cNvPr id="58" name="pl58"/>
+            <p:cNvSpPr/>
+            <p:nvPr/>
+          </p:nvSpPr>
+          <p:spPr>
+            <a:xfrm>
+              <a:off x="9387915" y="1434040"/>
+              <a:ext cx="0" cy="1937495"/>
+            </a:xfrm>
+            <a:custGeom>
+              <a:avLst/>
+              <a:pathLst>
+                <a:path w="0" h="1937495">
+                  <a:moveTo>
+                    <a:pt x="0" y="1937495"/>
                   </a:moveTo>
                   <a:lnTo>
                     <a:pt x="0" y="0"/>
@@ -5290,13 +5376,13 @@
         </p:sp>
         <p:sp>
           <p:nvSpPr>
-            <p:cNvPr id="57" name="pt57"/>
-            <p:cNvSpPr/>
-            <p:nvPr/>
-          </p:nvSpPr>
-          <p:spPr>
-            <a:xfrm>
-              <a:off x="3455691" y="3510412"/>
+            <p:cNvPr id="59" name="pt59"/>
+            <p:cNvSpPr/>
+            <p:nvPr/>
+          </p:nvSpPr>
+          <p:spPr>
+            <a:xfrm>
+              <a:off x="5988014" y="2298071"/>
               <a:ext cx="49651" cy="49651"/>
             </a:xfrm>
             <a:prstGeom prst="ellipse">
@@ -5325,13 +5411,13 @@
         </p:sp>
         <p:sp>
           <p:nvSpPr>
-            <p:cNvPr id="58" name="pt58"/>
-            <p:cNvSpPr/>
-            <p:nvPr/>
-          </p:nvSpPr>
-          <p:spPr>
-            <a:xfrm>
-              <a:off x="3827861" y="3524731"/>
+            <p:cNvPr id="60" name="pt60"/>
+            <p:cNvSpPr/>
+            <p:nvPr/>
+          </p:nvSpPr>
+          <p:spPr>
+            <a:xfrm>
+              <a:off x="6782149" y="2304128"/>
               <a:ext cx="49651" cy="49651"/>
             </a:xfrm>
             <a:prstGeom prst="ellipse">
@@ -5360,13 +5446,13 @@
         </p:sp>
         <p:sp>
           <p:nvSpPr>
-            <p:cNvPr id="59" name="pt59"/>
-            <p:cNvSpPr/>
-            <p:nvPr/>
-          </p:nvSpPr>
-          <p:spPr>
-            <a:xfrm>
-              <a:off x="4106988" y="3489910"/>
+            <p:cNvPr id="61" name="pt61"/>
+            <p:cNvSpPr/>
+            <p:nvPr/>
+          </p:nvSpPr>
+          <p:spPr>
+            <a:xfrm>
+              <a:off x="7377751" y="2289398"/>
               <a:ext cx="49651" cy="49651"/>
             </a:xfrm>
             <a:prstGeom prst="ellipse">
@@ -5395,13 +5481,13 @@
         </p:sp>
         <p:sp>
           <p:nvSpPr>
-            <p:cNvPr id="60" name="pt60"/>
-            <p:cNvSpPr/>
-            <p:nvPr/>
-          </p:nvSpPr>
-          <p:spPr>
-            <a:xfrm>
-              <a:off x="4572200" y="3495923"/>
+            <p:cNvPr id="62" name="pt62"/>
+            <p:cNvSpPr/>
+            <p:nvPr/>
+          </p:nvSpPr>
+          <p:spPr>
+            <a:xfrm>
+              <a:off x="8370420" y="2291941"/>
               <a:ext cx="49651" cy="49651"/>
             </a:xfrm>
             <a:prstGeom prst="ellipse">
@@ -5430,13 +5516,13 @@
         </p:sp>
         <p:sp>
           <p:nvSpPr>
-            <p:cNvPr id="61" name="pt61"/>
-            <p:cNvSpPr/>
-            <p:nvPr/>
-          </p:nvSpPr>
-          <p:spPr>
-            <a:xfrm>
-              <a:off x="5037412" y="3531444"/>
+            <p:cNvPr id="63" name="pt63"/>
+            <p:cNvSpPr/>
+            <p:nvPr/>
+          </p:nvSpPr>
+          <p:spPr>
+            <a:xfrm>
+              <a:off x="9363089" y="2306968"/>
               <a:ext cx="49651" cy="49651"/>
             </a:xfrm>
             <a:prstGeom prst="ellipse">
@@ -5465,24 +5551,24 @@
         </p:sp>
         <p:sp>
           <p:nvSpPr>
-            <p:cNvPr id="62" name="pl62"/>
-            <p:cNvSpPr/>
-            <p:nvPr/>
-          </p:nvSpPr>
-          <p:spPr>
-            <a:xfrm>
-              <a:off x="3354910" y="3262095"/>
-              <a:ext cx="251214" cy="0"/>
-            </a:xfrm>
-            <a:custGeom>
-              <a:avLst/>
-              <a:pathLst>
-                <a:path w="251214" h="0">
-                  <a:moveTo>
-                    <a:pt x="0" y="0"/>
-                  </a:moveTo>
-                  <a:lnTo>
-                    <a:pt x="251214" y="0"/>
+            <p:cNvPr id="64" name="pl64"/>
+            <p:cNvSpPr/>
+            <p:nvPr/>
+          </p:nvSpPr>
+          <p:spPr>
+            <a:xfrm>
+              <a:off x="5744819" y="2207351"/>
+              <a:ext cx="536041" cy="0"/>
+            </a:xfrm>
+            <a:custGeom>
+              <a:avLst/>
+              <a:pathLst>
+                <a:path w="536041" h="0">
+                  <a:moveTo>
+                    <a:pt x="0" y="0"/>
+                  </a:moveTo>
+                  <a:lnTo>
+                    <a:pt x="536041" y="0"/>
                   </a:lnTo>
                 </a:path>
               </a:pathLst>
@@ -5505,24 +5591,24 @@
         </p:sp>
         <p:sp>
           <p:nvSpPr>
-            <p:cNvPr id="63" name="pl63"/>
-            <p:cNvSpPr/>
-            <p:nvPr/>
-          </p:nvSpPr>
-          <p:spPr>
-            <a:xfrm>
-              <a:off x="3480517" y="3262095"/>
-              <a:ext cx="0" cy="508407"/>
-            </a:xfrm>
-            <a:custGeom>
-              <a:avLst/>
-              <a:pathLst>
-                <a:path w="0" h="508407">
-                  <a:moveTo>
-                    <a:pt x="0" y="0"/>
-                  </a:moveTo>
-                  <a:lnTo>
-                    <a:pt x="0" y="508407"/>
+            <p:cNvPr id="65" name="pl65"/>
+            <p:cNvSpPr/>
+            <p:nvPr/>
+          </p:nvSpPr>
+          <p:spPr>
+            <a:xfrm>
+              <a:off x="6012839" y="2207351"/>
+              <a:ext cx="0" cy="215068"/>
+            </a:xfrm>
+            <a:custGeom>
+              <a:avLst/>
+              <a:pathLst>
+                <a:path w="0" h="215068">
+                  <a:moveTo>
+                    <a:pt x="0" y="0"/>
+                  </a:moveTo>
+                  <a:lnTo>
+                    <a:pt x="0" y="215068"/>
                   </a:lnTo>
                 </a:path>
               </a:pathLst>
@@ -5545,24 +5631,24 @@
         </p:sp>
         <p:sp>
           <p:nvSpPr>
-            <p:cNvPr id="64" name="pl64"/>
-            <p:cNvSpPr/>
-            <p:nvPr/>
-          </p:nvSpPr>
-          <p:spPr>
-            <a:xfrm>
-              <a:off x="3354910" y="3770502"/>
-              <a:ext cx="251214" cy="0"/>
-            </a:xfrm>
-            <a:custGeom>
-              <a:avLst/>
-              <a:pathLst>
-                <a:path w="251214" h="0">
-                  <a:moveTo>
-                    <a:pt x="0" y="0"/>
-                  </a:moveTo>
-                  <a:lnTo>
-                    <a:pt x="251214" y="0"/>
+            <p:cNvPr id="66" name="pl66"/>
+            <p:cNvSpPr/>
+            <p:nvPr/>
+          </p:nvSpPr>
+          <p:spPr>
+            <a:xfrm>
+              <a:off x="5744819" y="2422419"/>
+              <a:ext cx="536041" cy="0"/>
+            </a:xfrm>
+            <a:custGeom>
+              <a:avLst/>
+              <a:pathLst>
+                <a:path w="536041" h="0">
+                  <a:moveTo>
+                    <a:pt x="0" y="0"/>
+                  </a:moveTo>
+                  <a:lnTo>
+                    <a:pt x="536041" y="0"/>
                   </a:lnTo>
                 </a:path>
               </a:pathLst>
@@ -5585,24 +5671,24 @@
         </p:sp>
         <p:sp>
           <p:nvSpPr>
-            <p:cNvPr id="65" name="pl65"/>
-            <p:cNvSpPr/>
-            <p:nvPr/>
-          </p:nvSpPr>
-          <p:spPr>
-            <a:xfrm>
-              <a:off x="3727079" y="3181742"/>
-              <a:ext cx="251214" cy="0"/>
-            </a:xfrm>
-            <a:custGeom>
-              <a:avLst/>
-              <a:pathLst>
-                <a:path w="251214" h="0">
-                  <a:moveTo>
-                    <a:pt x="0" y="0"/>
-                  </a:moveTo>
-                  <a:lnTo>
-                    <a:pt x="251214" y="0"/>
+            <p:cNvPr id="67" name="pl67"/>
+            <p:cNvSpPr/>
+            <p:nvPr/>
+          </p:nvSpPr>
+          <p:spPr>
+            <a:xfrm>
+              <a:off x="6538954" y="2173360"/>
+              <a:ext cx="536041" cy="0"/>
+            </a:xfrm>
+            <a:custGeom>
+              <a:avLst/>
+              <a:pathLst>
+                <a:path w="536041" h="0">
+                  <a:moveTo>
+                    <a:pt x="0" y="0"/>
+                  </a:moveTo>
+                  <a:lnTo>
+                    <a:pt x="536041" y="0"/>
                   </a:lnTo>
                 </a:path>
               </a:pathLst>
@@ -5625,24 +5711,24 @@
         </p:sp>
         <p:sp>
           <p:nvSpPr>
-            <p:cNvPr id="66" name="pl66"/>
-            <p:cNvSpPr/>
-            <p:nvPr/>
-          </p:nvSpPr>
-          <p:spPr>
-            <a:xfrm>
-              <a:off x="3852687" y="3181742"/>
-              <a:ext cx="0" cy="656044"/>
-            </a:xfrm>
-            <a:custGeom>
-              <a:avLst/>
-              <a:pathLst>
-                <a:path w="0" h="656044">
-                  <a:moveTo>
-                    <a:pt x="0" y="0"/>
-                  </a:moveTo>
-                  <a:lnTo>
-                    <a:pt x="0" y="656044"/>
+            <p:cNvPr id="68" name="pl68"/>
+            <p:cNvSpPr/>
+            <p:nvPr/>
+          </p:nvSpPr>
+          <p:spPr>
+            <a:xfrm>
+              <a:off x="6806975" y="2173360"/>
+              <a:ext cx="0" cy="277522"/>
+            </a:xfrm>
+            <a:custGeom>
+              <a:avLst/>
+              <a:pathLst>
+                <a:path w="0" h="277522">
+                  <a:moveTo>
+                    <a:pt x="0" y="0"/>
+                  </a:moveTo>
+                  <a:lnTo>
+                    <a:pt x="0" y="277522"/>
                   </a:lnTo>
                 </a:path>
               </a:pathLst>
@@ -5665,24 +5751,24 @@
         </p:sp>
         <p:sp>
           <p:nvSpPr>
-            <p:cNvPr id="67" name="pl67"/>
-            <p:cNvSpPr/>
-            <p:nvPr/>
-          </p:nvSpPr>
-          <p:spPr>
-            <a:xfrm>
-              <a:off x="3727079" y="3837787"/>
-              <a:ext cx="251214" cy="0"/>
-            </a:xfrm>
-            <a:custGeom>
-              <a:avLst/>
-              <a:pathLst>
-                <a:path w="251214" h="0">
-                  <a:moveTo>
-                    <a:pt x="0" y="0"/>
-                  </a:moveTo>
-                  <a:lnTo>
-                    <a:pt x="251214" y="0"/>
+            <p:cNvPr id="69" name="pl69"/>
+            <p:cNvSpPr/>
+            <p:nvPr/>
+          </p:nvSpPr>
+          <p:spPr>
+            <a:xfrm>
+              <a:off x="6538954" y="2450882"/>
+              <a:ext cx="536041" cy="0"/>
+            </a:xfrm>
+            <a:custGeom>
+              <a:avLst/>
+              <a:pathLst>
+                <a:path w="536041" h="0">
+                  <a:moveTo>
+                    <a:pt x="0" y="0"/>
+                  </a:moveTo>
+                  <a:lnTo>
+                    <a:pt x="536041" y="0"/>
                   </a:lnTo>
                 </a:path>
               </a:pathLst>
@@ -5705,24 +5791,24 @@
         </p:sp>
         <p:sp>
           <p:nvSpPr>
-            <p:cNvPr id="68" name="pl68"/>
-            <p:cNvSpPr/>
-            <p:nvPr/>
-          </p:nvSpPr>
-          <p:spPr>
-            <a:xfrm>
-              <a:off x="4471419" y="1873520"/>
-              <a:ext cx="251214" cy="0"/>
-            </a:xfrm>
-            <a:custGeom>
-              <a:avLst/>
-              <a:pathLst>
-                <a:path w="251214" h="0">
-                  <a:moveTo>
-                    <a:pt x="0" y="0"/>
-                  </a:moveTo>
-                  <a:lnTo>
-                    <a:pt x="251214" y="0"/>
+            <p:cNvPr id="70" name="pl70"/>
+            <p:cNvSpPr/>
+            <p:nvPr/>
+          </p:nvSpPr>
+          <p:spPr>
+            <a:xfrm>
+              <a:off x="8127225" y="1619950"/>
+              <a:ext cx="536041" cy="0"/>
+            </a:xfrm>
+            <a:custGeom>
+              <a:avLst/>
+              <a:pathLst>
+                <a:path w="536041" h="0">
+                  <a:moveTo>
+                    <a:pt x="0" y="0"/>
+                  </a:moveTo>
+                  <a:lnTo>
+                    <a:pt x="536041" y="0"/>
                   </a:lnTo>
                 </a:path>
               </a:pathLst>
@@ -5745,24 +5831,24 @@
         </p:sp>
         <p:sp>
           <p:nvSpPr>
-            <p:cNvPr id="69" name="pl69"/>
-            <p:cNvSpPr/>
-            <p:nvPr/>
-          </p:nvSpPr>
-          <p:spPr>
-            <a:xfrm>
-              <a:off x="4597026" y="1873520"/>
-              <a:ext cx="0" cy="2896878"/>
-            </a:xfrm>
-            <a:custGeom>
-              <a:avLst/>
-              <a:pathLst>
-                <a:path w="0" h="2896878">
-                  <a:moveTo>
-                    <a:pt x="0" y="0"/>
-                  </a:moveTo>
-                  <a:lnTo>
-                    <a:pt x="0" y="2896878"/>
+            <p:cNvPr id="71" name="pl71"/>
+            <p:cNvSpPr/>
+            <p:nvPr/>
+          </p:nvSpPr>
+          <p:spPr>
+            <a:xfrm>
+              <a:off x="8395246" y="1619950"/>
+              <a:ext cx="0" cy="1225448"/>
+            </a:xfrm>
+            <a:custGeom>
+              <a:avLst/>
+              <a:pathLst>
+                <a:path w="0" h="1225448">
+                  <a:moveTo>
+                    <a:pt x="0" y="0"/>
+                  </a:moveTo>
+                  <a:lnTo>
+                    <a:pt x="0" y="1225448"/>
                   </a:lnTo>
                 </a:path>
               </a:pathLst>
@@ -5785,24 +5871,24 @@
         </p:sp>
         <p:sp>
           <p:nvSpPr>
-            <p:cNvPr id="70" name="pl70"/>
-            <p:cNvSpPr/>
-            <p:nvPr/>
-          </p:nvSpPr>
-          <p:spPr>
-            <a:xfrm>
-              <a:off x="4471419" y="4770398"/>
-              <a:ext cx="251214" cy="0"/>
-            </a:xfrm>
-            <a:custGeom>
-              <a:avLst/>
-              <a:pathLst>
-                <a:path w="251214" h="0">
-                  <a:moveTo>
-                    <a:pt x="0" y="0"/>
-                  </a:moveTo>
-                  <a:lnTo>
-                    <a:pt x="251214" y="0"/>
+            <p:cNvPr id="72" name="pl72"/>
+            <p:cNvSpPr/>
+            <p:nvPr/>
+          </p:nvSpPr>
+          <p:spPr>
+            <a:xfrm>
+              <a:off x="8127225" y="2845398"/>
+              <a:ext cx="536041" cy="0"/>
+            </a:xfrm>
+            <a:custGeom>
+              <a:avLst/>
+              <a:pathLst>
+                <a:path w="536041" h="0">
+                  <a:moveTo>
+                    <a:pt x="0" y="0"/>
+                  </a:moveTo>
+                  <a:lnTo>
+                    <a:pt x="536041" y="0"/>
                   </a:lnTo>
                 </a:path>
               </a:pathLst>
@@ -5825,24 +5911,24 @@
         </p:sp>
         <p:sp>
           <p:nvSpPr>
-            <p:cNvPr id="71" name="pl71"/>
-            <p:cNvSpPr/>
-            <p:nvPr/>
-          </p:nvSpPr>
-          <p:spPr>
-            <a:xfrm>
-              <a:off x="4936631" y="1649289"/>
-              <a:ext cx="251214" cy="0"/>
-            </a:xfrm>
-            <a:custGeom>
-              <a:avLst/>
-              <a:pathLst>
-                <a:path w="251214" h="0">
-                  <a:moveTo>
-                    <a:pt x="0" y="0"/>
-                  </a:moveTo>
-                  <a:lnTo>
-                    <a:pt x="251214" y="0"/>
+            <p:cNvPr id="73" name="pl73"/>
+            <p:cNvSpPr/>
+            <p:nvPr/>
+          </p:nvSpPr>
+          <p:spPr>
+            <a:xfrm>
+              <a:off x="9119895" y="1525096"/>
+              <a:ext cx="536041" cy="0"/>
+            </a:xfrm>
+            <a:custGeom>
+              <a:avLst/>
+              <a:pathLst>
+                <a:path w="536041" h="0">
+                  <a:moveTo>
+                    <a:pt x="0" y="0"/>
+                  </a:moveTo>
+                  <a:lnTo>
+                    <a:pt x="536041" y="0"/>
                   </a:lnTo>
                 </a:path>
               </a:pathLst>
@@ -5865,24 +5951,24 @@
         </p:sp>
         <p:sp>
           <p:nvSpPr>
-            <p:cNvPr id="72" name="pl72"/>
-            <p:cNvSpPr/>
-            <p:nvPr/>
-          </p:nvSpPr>
-          <p:spPr>
-            <a:xfrm>
-              <a:off x="5062238" y="1649289"/>
-              <a:ext cx="0" cy="3379119"/>
-            </a:xfrm>
-            <a:custGeom>
-              <a:avLst/>
-              <a:pathLst>
-                <a:path w="0" h="3379119">
-                  <a:moveTo>
-                    <a:pt x="0" y="0"/>
-                  </a:moveTo>
-                  <a:lnTo>
-                    <a:pt x="0" y="3379119"/>
+            <p:cNvPr id="74" name="pl74"/>
+            <p:cNvSpPr/>
+            <p:nvPr/>
+          </p:nvSpPr>
+          <p:spPr>
+            <a:xfrm>
+              <a:off x="9387915" y="1525096"/>
+              <a:ext cx="0" cy="1429447"/>
+            </a:xfrm>
+            <a:custGeom>
+              <a:avLst/>
+              <a:pathLst>
+                <a:path w="0" h="1429447">
+                  <a:moveTo>
+                    <a:pt x="0" y="0"/>
+                  </a:moveTo>
+                  <a:lnTo>
+                    <a:pt x="0" y="1429447"/>
                   </a:lnTo>
                 </a:path>
               </a:pathLst>
@@ -5905,24 +5991,24 @@
         </p:sp>
         <p:sp>
           <p:nvSpPr>
-            <p:cNvPr id="73" name="pl73"/>
-            <p:cNvSpPr/>
-            <p:nvPr/>
-          </p:nvSpPr>
-          <p:spPr>
-            <a:xfrm>
-              <a:off x="4936631" y="5028409"/>
-              <a:ext cx="251214" cy="0"/>
-            </a:xfrm>
-            <a:custGeom>
-              <a:avLst/>
-              <a:pathLst>
-                <a:path w="251214" h="0">
-                  <a:moveTo>
-                    <a:pt x="0" y="0"/>
-                  </a:moveTo>
-                  <a:lnTo>
-                    <a:pt x="251214" y="0"/>
+            <p:cNvPr id="75" name="pl75"/>
+            <p:cNvSpPr/>
+            <p:nvPr/>
+          </p:nvSpPr>
+          <p:spPr>
+            <a:xfrm>
+              <a:off x="9119895" y="2954543"/>
+              <a:ext cx="536041" cy="0"/>
+            </a:xfrm>
+            <a:custGeom>
+              <a:avLst/>
+              <a:pathLst>
+                <a:path w="536041" h="0">
+                  <a:moveTo>
+                    <a:pt x="0" y="0"/>
+                  </a:moveTo>
+                  <a:lnTo>
+                    <a:pt x="536041" y="0"/>
                   </a:lnTo>
                 </a:path>
               </a:pathLst>
@@ -5945,27 +6031,27 @@
         </p:sp>
         <p:sp>
           <p:nvSpPr>
-            <p:cNvPr id="74" name="pl74"/>
-            <p:cNvSpPr/>
-            <p:nvPr/>
-          </p:nvSpPr>
-          <p:spPr>
-            <a:xfrm>
-              <a:off x="3263263" y="3585305"/>
-              <a:ext cx="2016229" cy="0"/>
-            </a:xfrm>
-            <a:custGeom>
-              <a:avLst/>
-              <a:pathLst>
-                <a:path w="2016229" h="0">
-                  <a:moveTo>
-                    <a:pt x="0" y="0"/>
-                  </a:moveTo>
-                  <a:lnTo>
-                    <a:pt x="2016229" y="0"/>
-                  </a:lnTo>
-                  <a:lnTo>
-                    <a:pt x="2016229" y="0"/>
+            <p:cNvPr id="76" name="pl76"/>
+            <p:cNvSpPr/>
+            <p:nvPr/>
+          </p:nvSpPr>
+          <p:spPr>
+            <a:xfrm>
+              <a:off x="5549263" y="2332333"/>
+              <a:ext cx="4302229" cy="0"/>
+            </a:xfrm>
+            <a:custGeom>
+              <a:avLst/>
+              <a:pathLst>
+                <a:path w="4302229" h="0">
+                  <a:moveTo>
+                    <a:pt x="0" y="0"/>
+                  </a:moveTo>
+                  <a:lnTo>
+                    <a:pt x="4302229" y="0"/>
+                  </a:lnTo>
+                  <a:lnTo>
+                    <a:pt x="4302229" y="0"/>
                   </a:lnTo>
                 </a:path>
               </a:pathLst>
@@ -5988,14 +6074,100 @@
         </p:sp>
         <p:sp>
           <p:nvSpPr>
-            <p:cNvPr id="75" name="rc75"/>
-            <p:cNvSpPr/>
-            <p:nvPr/>
-          </p:nvSpPr>
-          <p:spPr>
-            <a:xfrm>
-              <a:off x="3263263" y="1434040"/>
-              <a:ext cx="2016229" cy="4580111"/>
+            <p:cNvPr id="77" name="pl77"/>
+            <p:cNvSpPr/>
+            <p:nvPr/>
+          </p:nvSpPr>
+          <p:spPr>
+            <a:xfrm>
+              <a:off x="5549263" y="2085743"/>
+              <a:ext cx="4302229" cy="0"/>
+            </a:xfrm>
+            <a:custGeom>
+              <a:avLst/>
+              <a:pathLst>
+                <a:path w="4302229" h="0">
+                  <a:moveTo>
+                    <a:pt x="0" y="0"/>
+                  </a:moveTo>
+                  <a:lnTo>
+                    <a:pt x="4302229" y="0"/>
+                  </a:lnTo>
+                  <a:lnTo>
+                    <a:pt x="4302229" y="0"/>
+                  </a:lnTo>
+                </a:path>
+              </a:pathLst>
+            </a:custGeom>
+            <a:ln w="13550" cap="flat">
+              <a:solidFill>
+                <a:srgbClr val="B3B3B3">
+                  <a:alpha val="100000"/>
+                </a:srgbClr>
+              </a:solidFill>
+              <a:prstDash val="dash"/>
+              <a:round/>
+            </a:ln>
+          </p:spPr>
+          <p:txBody>
+            <a:bodyPr/>
+            <a:lstStyle/>
+            <a:p/>
+          </p:txBody>
+        </p:sp>
+        <p:sp>
+          <p:nvSpPr>
+            <p:cNvPr id="78" name="pl78"/>
+            <p:cNvSpPr/>
+            <p:nvPr/>
+          </p:nvSpPr>
+          <p:spPr>
+            <a:xfrm>
+              <a:off x="5549263" y="2578924"/>
+              <a:ext cx="4302229" cy="0"/>
+            </a:xfrm>
+            <a:custGeom>
+              <a:avLst/>
+              <a:pathLst>
+                <a:path w="4302229" h="0">
+                  <a:moveTo>
+                    <a:pt x="0" y="0"/>
+                  </a:moveTo>
+                  <a:lnTo>
+                    <a:pt x="4302229" y="0"/>
+                  </a:lnTo>
+                  <a:lnTo>
+                    <a:pt x="4302229" y="0"/>
+                  </a:lnTo>
+                </a:path>
+              </a:pathLst>
+            </a:custGeom>
+            <a:ln w="13550" cap="flat">
+              <a:solidFill>
+                <a:srgbClr val="B3B3B3">
+                  <a:alpha val="100000"/>
+                </a:srgbClr>
+              </a:solidFill>
+              <a:prstDash val="dash"/>
+              <a:round/>
+            </a:ln>
+          </p:spPr>
+          <p:txBody>
+            <a:bodyPr/>
+            <a:lstStyle/>
+            <a:p/>
+          </p:txBody>
+        </p:sp>
+        <p:sp>
+          <p:nvSpPr>
+            <p:cNvPr id="79" name="rc79"/>
+            <p:cNvSpPr/>
+            <p:nvPr/>
+          </p:nvSpPr>
+          <p:spPr>
+            <a:xfrm>
+              <a:off x="5549263" y="1434040"/>
+              <a:ext cx="4302229" cy="1937495"/>
             </a:xfrm>
             <a:prstGeom prst="rect">
               <a:avLst/>
@@ -6018,14 +6190,14 @@
         </p:sp>
         <p:sp>
           <p:nvSpPr>
-            <p:cNvPr id="76" name="rc76"/>
+            <p:cNvPr id="80" name="rc80"/>
             <p:cNvSpPr/>
             <p:nvPr/>
           </p:nvSpPr>
           <p:spPr>
             <a:xfrm>
               <a:off x="1177445" y="1208398"/>
-              <a:ext cx="2016229" cy="225642"/>
+              <a:ext cx="4302229" cy="225642"/>
             </a:xfrm>
             <a:prstGeom prst="rect">
               <a:avLst/>
@@ -6053,13 +6225,13 @@
         </p:sp>
         <p:sp>
           <p:nvSpPr>
-            <p:cNvPr id="77" name="tx77"/>
-            <p:cNvSpPr/>
-            <p:nvPr/>
-          </p:nvSpPr>
-          <p:spPr>
-            <a:xfrm>
-              <a:off x="2142067" y="1279527"/>
+            <p:cNvPr id="81" name="tx81"/>
+            <p:cNvSpPr/>
+            <p:nvPr/>
+          </p:nvSpPr>
+          <p:spPr>
+            <a:xfrm>
+              <a:off x="3285067" y="1279527"/>
               <a:ext cx="86985" cy="81691"/>
             </a:xfrm>
             <a:prstGeom prst="rect">
@@ -6099,14 +6271,14 @@
         </p:sp>
         <p:sp>
           <p:nvSpPr>
-            <p:cNvPr id="78" name="rc78"/>
-            <p:cNvSpPr/>
-            <p:nvPr/>
-          </p:nvSpPr>
-          <p:spPr>
-            <a:xfrm>
-              <a:off x="3263263" y="1208398"/>
-              <a:ext cx="2016229" cy="225642"/>
+            <p:cNvPr id="82" name="rc82"/>
+            <p:cNvSpPr/>
+            <p:nvPr/>
+          </p:nvSpPr>
+          <p:spPr>
+            <a:xfrm>
+              <a:off x="5549263" y="1208398"/>
+              <a:ext cx="4302229" cy="225642"/>
             </a:xfrm>
             <a:prstGeom prst="rect">
               <a:avLst/>
@@ -6134,13 +6306,13 @@
         </p:sp>
         <p:sp>
           <p:nvSpPr>
-            <p:cNvPr id="79" name="tx79"/>
-            <p:cNvSpPr/>
-            <p:nvPr/>
-          </p:nvSpPr>
-          <p:spPr>
-            <a:xfrm>
-              <a:off x="4227885" y="1280891"/>
+            <p:cNvPr id="83" name="tx83"/>
+            <p:cNvSpPr/>
+            <p:nvPr/>
+          </p:nvSpPr>
+          <p:spPr>
+            <a:xfrm>
+              <a:off x="7656885" y="1280891"/>
               <a:ext cx="86985" cy="80327"/>
             </a:xfrm>
             <a:prstGeom prst="rect">
@@ -6180,13 +6352,13 @@
         </p:sp>
         <p:sp>
           <p:nvSpPr>
-            <p:cNvPr id="80" name="pl80"/>
-            <p:cNvSpPr/>
-            <p:nvPr/>
-          </p:nvSpPr>
-          <p:spPr>
-            <a:xfrm>
-              <a:off x="1580784" y="6014152"/>
+            <p:cNvPr id="84" name="pl84"/>
+            <p:cNvSpPr/>
+            <p:nvPr/>
+          </p:nvSpPr>
+          <p:spPr>
+            <a:xfrm>
+              <a:off x="2038089" y="3371536"/>
               <a:ext cx="0" cy="34794"/>
             </a:xfrm>
             <a:custGeom>
@@ -6220,13 +6392,13 @@
         </p:sp>
         <p:sp>
           <p:nvSpPr>
-            <p:cNvPr id="81" name="pl81"/>
-            <p:cNvSpPr/>
-            <p:nvPr/>
-          </p:nvSpPr>
-          <p:spPr>
-            <a:xfrm>
-              <a:off x="2045996" y="6014152"/>
+            <p:cNvPr id="85" name="pl85"/>
+            <p:cNvSpPr/>
+            <p:nvPr/>
+          </p:nvSpPr>
+          <p:spPr>
+            <a:xfrm>
+              <a:off x="3030759" y="3371536"/>
               <a:ext cx="0" cy="34794"/>
             </a:xfrm>
             <a:custGeom>
@@ -6260,13 +6432,13 @@
         </p:sp>
         <p:sp>
           <p:nvSpPr>
-            <p:cNvPr id="82" name="pl82"/>
-            <p:cNvSpPr/>
-            <p:nvPr/>
-          </p:nvSpPr>
-          <p:spPr>
-            <a:xfrm>
-              <a:off x="2511208" y="6014152"/>
+            <p:cNvPr id="86" name="pl86"/>
+            <p:cNvSpPr/>
+            <p:nvPr/>
+          </p:nvSpPr>
+          <p:spPr>
+            <a:xfrm>
+              <a:off x="4023428" y="3371536"/>
               <a:ext cx="0" cy="34794"/>
             </a:xfrm>
             <a:custGeom>
@@ -6300,13 +6472,13 @@
         </p:sp>
         <p:sp>
           <p:nvSpPr>
-            <p:cNvPr id="83" name="pl83"/>
-            <p:cNvSpPr/>
-            <p:nvPr/>
-          </p:nvSpPr>
-          <p:spPr>
-            <a:xfrm>
-              <a:off x="2976420" y="6014152"/>
+            <p:cNvPr id="87" name="pl87"/>
+            <p:cNvSpPr/>
+            <p:nvPr/>
+          </p:nvSpPr>
+          <p:spPr>
+            <a:xfrm>
+              <a:off x="5016097" y="3371536"/>
               <a:ext cx="0" cy="34794"/>
             </a:xfrm>
             <a:custGeom>
@@ -6340,13 +6512,13 @@
         </p:sp>
         <p:sp>
           <p:nvSpPr>
-            <p:cNvPr id="84" name="tx84"/>
-            <p:cNvSpPr/>
-            <p:nvPr/>
-          </p:nvSpPr>
-          <p:spPr>
-            <a:xfrm>
-              <a:off x="1472025" y="6075090"/>
+            <p:cNvPr id="88" name="tx88"/>
+            <p:cNvSpPr/>
+            <p:nvPr/>
+          </p:nvSpPr>
+          <p:spPr>
+            <a:xfrm>
+              <a:off x="1929331" y="3432474"/>
               <a:ext cx="217517" cy="81691"/>
             </a:xfrm>
             <a:prstGeom prst="rect">
@@ -6386,13 +6558,13 @@
         </p:sp>
         <p:sp>
           <p:nvSpPr>
-            <p:cNvPr id="85" name="tx85"/>
-            <p:cNvSpPr/>
-            <p:nvPr/>
-          </p:nvSpPr>
-          <p:spPr>
-            <a:xfrm>
-              <a:off x="1937237" y="6075090"/>
+            <p:cNvPr id="89" name="tx89"/>
+            <p:cNvSpPr/>
+            <p:nvPr/>
+          </p:nvSpPr>
+          <p:spPr>
+            <a:xfrm>
+              <a:off x="2922000" y="3432474"/>
               <a:ext cx="217517" cy="81691"/>
             </a:xfrm>
             <a:prstGeom prst="rect">
@@ -6432,13 +6604,13 @@
         </p:sp>
         <p:sp>
           <p:nvSpPr>
-            <p:cNvPr id="86" name="tx86"/>
-            <p:cNvSpPr/>
-            <p:nvPr/>
-          </p:nvSpPr>
-          <p:spPr>
-            <a:xfrm>
-              <a:off x="2402449" y="6075090"/>
+            <p:cNvPr id="90" name="tx90"/>
+            <p:cNvSpPr/>
+            <p:nvPr/>
+          </p:nvSpPr>
+          <p:spPr>
+            <a:xfrm>
+              <a:off x="3914669" y="3432474"/>
               <a:ext cx="217517" cy="81691"/>
             </a:xfrm>
             <a:prstGeom prst="rect">
@@ -6478,13 +6650,13 @@
         </p:sp>
         <p:sp>
           <p:nvSpPr>
-            <p:cNvPr id="87" name="tx87"/>
-            <p:cNvSpPr/>
-            <p:nvPr/>
-          </p:nvSpPr>
-          <p:spPr>
-            <a:xfrm>
-              <a:off x="2867661" y="6075090"/>
+            <p:cNvPr id="91" name="tx91"/>
+            <p:cNvSpPr/>
+            <p:nvPr/>
+          </p:nvSpPr>
+          <p:spPr>
+            <a:xfrm>
+              <a:off x="4907339" y="3432474"/>
               <a:ext cx="217517" cy="81691"/>
             </a:xfrm>
             <a:prstGeom prst="rect">
@@ -6524,13 +6696,13 @@
         </p:sp>
         <p:sp>
           <p:nvSpPr>
-            <p:cNvPr id="88" name="pl88"/>
-            <p:cNvSpPr/>
-            <p:nvPr/>
-          </p:nvSpPr>
-          <p:spPr>
-            <a:xfrm>
-              <a:off x="3666602" y="6014152"/>
+            <p:cNvPr id="92" name="pl92"/>
+            <p:cNvSpPr/>
+            <p:nvPr/>
+          </p:nvSpPr>
+          <p:spPr>
+            <a:xfrm>
+              <a:off x="6409907" y="3371536"/>
               <a:ext cx="0" cy="34794"/>
             </a:xfrm>
             <a:custGeom>
@@ -6564,13 +6736,13 @@
         </p:sp>
         <p:sp>
           <p:nvSpPr>
-            <p:cNvPr id="89" name="pl89"/>
-            <p:cNvSpPr/>
-            <p:nvPr/>
-          </p:nvSpPr>
-          <p:spPr>
-            <a:xfrm>
-              <a:off x="4131814" y="6014152"/>
+            <p:cNvPr id="93" name="pl93"/>
+            <p:cNvSpPr/>
+            <p:nvPr/>
+          </p:nvSpPr>
+          <p:spPr>
+            <a:xfrm>
+              <a:off x="7402577" y="3371536"/>
               <a:ext cx="0" cy="34794"/>
             </a:xfrm>
             <a:custGeom>
@@ -6604,13 +6776,13 @@
         </p:sp>
         <p:sp>
           <p:nvSpPr>
-            <p:cNvPr id="90" name="pl90"/>
-            <p:cNvSpPr/>
-            <p:nvPr/>
-          </p:nvSpPr>
-          <p:spPr>
-            <a:xfrm>
-              <a:off x="4597026" y="6014152"/>
+            <p:cNvPr id="94" name="pl94"/>
+            <p:cNvSpPr/>
+            <p:nvPr/>
+          </p:nvSpPr>
+          <p:spPr>
+            <a:xfrm>
+              <a:off x="8395246" y="3371536"/>
               <a:ext cx="0" cy="34794"/>
             </a:xfrm>
             <a:custGeom>
@@ -6644,13 +6816,13 @@
         </p:sp>
         <p:sp>
           <p:nvSpPr>
-            <p:cNvPr id="91" name="pl91"/>
-            <p:cNvSpPr/>
-            <p:nvPr/>
-          </p:nvSpPr>
-          <p:spPr>
-            <a:xfrm>
-              <a:off x="5062238" y="6014152"/>
+            <p:cNvPr id="95" name="pl95"/>
+            <p:cNvSpPr/>
+            <p:nvPr/>
+          </p:nvSpPr>
+          <p:spPr>
+            <a:xfrm>
+              <a:off x="9387915" y="3371536"/>
               <a:ext cx="0" cy="34794"/>
             </a:xfrm>
             <a:custGeom>
@@ -6684,13 +6856,13 @@
         </p:sp>
         <p:sp>
           <p:nvSpPr>
-            <p:cNvPr id="92" name="tx92"/>
-            <p:cNvSpPr/>
-            <p:nvPr/>
-          </p:nvSpPr>
-          <p:spPr>
-            <a:xfrm>
-              <a:off x="3557843" y="6075090"/>
+            <p:cNvPr id="96" name="tx96"/>
+            <p:cNvSpPr/>
+            <p:nvPr/>
+          </p:nvSpPr>
+          <p:spPr>
+            <a:xfrm>
+              <a:off x="6301149" y="3432474"/>
               <a:ext cx="217517" cy="81691"/>
             </a:xfrm>
             <a:prstGeom prst="rect">
@@ -6730,13 +6902,13 @@
         </p:sp>
         <p:sp>
           <p:nvSpPr>
-            <p:cNvPr id="93" name="tx93"/>
-            <p:cNvSpPr/>
-            <p:nvPr/>
-          </p:nvSpPr>
-          <p:spPr>
-            <a:xfrm>
-              <a:off x="4023055" y="6075090"/>
+            <p:cNvPr id="97" name="tx97"/>
+            <p:cNvSpPr/>
+            <p:nvPr/>
+          </p:nvSpPr>
+          <p:spPr>
+            <a:xfrm>
+              <a:off x="7293818" y="3432474"/>
               <a:ext cx="217517" cy="81691"/>
             </a:xfrm>
             <a:prstGeom prst="rect">
@@ -6776,13 +6948,13 @@
         </p:sp>
         <p:sp>
           <p:nvSpPr>
-            <p:cNvPr id="94" name="tx94"/>
-            <p:cNvSpPr/>
-            <p:nvPr/>
-          </p:nvSpPr>
-          <p:spPr>
-            <a:xfrm>
-              <a:off x="4488267" y="6075090"/>
+            <p:cNvPr id="98" name="tx98"/>
+            <p:cNvSpPr/>
+            <p:nvPr/>
+          </p:nvSpPr>
+          <p:spPr>
+            <a:xfrm>
+              <a:off x="8286487" y="3432474"/>
               <a:ext cx="217517" cy="81691"/>
             </a:xfrm>
             <a:prstGeom prst="rect">
@@ -6822,13 +6994,13 @@
         </p:sp>
         <p:sp>
           <p:nvSpPr>
-            <p:cNvPr id="95" name="tx95"/>
-            <p:cNvSpPr/>
-            <p:nvPr/>
-          </p:nvSpPr>
-          <p:spPr>
-            <a:xfrm>
-              <a:off x="4953479" y="6075090"/>
+            <p:cNvPr id="99" name="tx99"/>
+            <p:cNvSpPr/>
+            <p:nvPr/>
+          </p:nvSpPr>
+          <p:spPr>
+            <a:xfrm>
+              <a:off x="9279157" y="3432474"/>
               <a:ext cx="217517" cy="81691"/>
             </a:xfrm>
             <a:prstGeom prst="rect">
@@ -6868,13 +7040,13 @@
         </p:sp>
         <p:sp>
           <p:nvSpPr>
-            <p:cNvPr id="96" name="tx96"/>
-            <p:cNvSpPr/>
-            <p:nvPr/>
-          </p:nvSpPr>
-          <p:spPr>
-            <a:xfrm>
-              <a:off x="1015442" y="5488109"/>
+            <p:cNvPr id="100" name="tx100"/>
+            <p:cNvSpPr/>
+            <p:nvPr/>
+          </p:nvSpPr>
+          <p:spPr>
+            <a:xfrm>
+              <a:off x="1015442" y="3125771"/>
               <a:ext cx="99372" cy="80272"/>
             </a:xfrm>
             <a:prstGeom prst="rect">
@@ -6914,13 +7086,13 @@
         </p:sp>
         <p:sp>
           <p:nvSpPr>
-            <p:cNvPr id="97" name="tx97"/>
-            <p:cNvSpPr/>
-            <p:nvPr/>
-          </p:nvSpPr>
-          <p:spPr>
-            <a:xfrm>
-              <a:off x="1052659" y="4098778"/>
+            <p:cNvPr id="101" name="tx101"/>
+            <p:cNvSpPr/>
+            <p:nvPr/>
+          </p:nvSpPr>
+          <p:spPr>
+            <a:xfrm>
+              <a:off x="1052659" y="2537232"/>
               <a:ext cx="62155" cy="81691"/>
             </a:xfrm>
             <a:prstGeom prst="rect">
@@ -6960,13 +7132,13 @@
         </p:sp>
         <p:sp>
           <p:nvSpPr>
-            <p:cNvPr id="98" name="tx98"/>
-            <p:cNvSpPr/>
-            <p:nvPr/>
-          </p:nvSpPr>
-          <p:spPr>
-            <a:xfrm>
-              <a:off x="1052659" y="2712284"/>
+            <p:cNvPr id="102" name="tx102"/>
+            <p:cNvSpPr/>
+            <p:nvPr/>
+          </p:nvSpPr>
+          <p:spPr>
+            <a:xfrm>
+              <a:off x="1052659" y="1951531"/>
               <a:ext cx="62155" cy="80272"/>
             </a:xfrm>
             <a:prstGeom prst="rect">
@@ -7006,13 +7178,13 @@
         </p:sp>
         <p:sp>
           <p:nvSpPr>
-            <p:cNvPr id="99" name="pl99"/>
-            <p:cNvSpPr/>
-            <p:nvPr/>
-          </p:nvSpPr>
-          <p:spPr>
-            <a:xfrm>
-              <a:off x="1142650" y="5528382"/>
+            <p:cNvPr id="103" name="pl103"/>
+            <p:cNvSpPr/>
+            <p:nvPr/>
+          </p:nvSpPr>
+          <p:spPr>
+            <a:xfrm>
+              <a:off x="1142650" y="3166044"/>
               <a:ext cx="34794" cy="0"/>
             </a:xfrm>
             <a:custGeom>
@@ -7046,13 +7218,13 @@
         </p:sp>
         <p:sp>
           <p:nvSpPr>
-            <p:cNvPr id="100" name="pl100"/>
-            <p:cNvSpPr/>
-            <p:nvPr/>
-          </p:nvSpPr>
-          <p:spPr>
-            <a:xfrm>
-              <a:off x="1142650" y="4140470"/>
+            <p:cNvPr id="104" name="pl104"/>
+            <p:cNvSpPr/>
+            <p:nvPr/>
+          </p:nvSpPr>
+          <p:spPr>
+            <a:xfrm>
+              <a:off x="1142650" y="2578924"/>
               <a:ext cx="34794" cy="0"/>
             </a:xfrm>
             <a:custGeom>
@@ -7086,13 +7258,13 @@
         </p:sp>
         <p:sp>
           <p:nvSpPr>
-            <p:cNvPr id="101" name="pl101"/>
-            <p:cNvSpPr/>
-            <p:nvPr/>
-          </p:nvSpPr>
-          <p:spPr>
-            <a:xfrm>
-              <a:off x="1142650" y="2752557"/>
+            <p:cNvPr id="105" name="pl105"/>
+            <p:cNvSpPr/>
+            <p:nvPr/>
+          </p:nvSpPr>
+          <p:spPr>
+            <a:xfrm>
+              <a:off x="1142650" y="1991804"/>
               <a:ext cx="34794" cy="0"/>
             </a:xfrm>
             <a:custGeom>
@@ -7126,13 +7298,13 @@
         </p:sp>
         <p:sp>
           <p:nvSpPr>
-            <p:cNvPr id="102" name="tx102"/>
-            <p:cNvSpPr/>
-            <p:nvPr/>
-          </p:nvSpPr>
-          <p:spPr>
-            <a:xfrm>
-              <a:off x="2246169" y="6224239"/>
+            <p:cNvPr id="106" name="tx106"/>
+            <p:cNvSpPr/>
+            <p:nvPr/>
+          </p:nvSpPr>
+          <p:spPr>
+            <a:xfrm>
+              <a:off x="4532169" y="3581623"/>
               <a:ext cx="1964599" cy="101637"/>
             </a:xfrm>
             <a:prstGeom prst="rect">
@@ -7172,13 +7344,13 @@
         </p:sp>
         <p:sp>
           <p:nvSpPr>
-            <p:cNvPr id="103" name="tx103"/>
+            <p:cNvPr id="107" name="tx107"/>
             <p:cNvSpPr/>
             <p:nvPr/>
           </p:nvSpPr>
           <p:spPr>
             <a:xfrm rot="-5400000">
-              <a:off x="253047" y="3659396"/>
+              <a:off x="253047" y="2338088"/>
               <a:ext cx="1257845" cy="129399"/>
             </a:xfrm>
             <a:prstGeom prst="rect">
@@ -7218,14 +7390,14 @@
         </p:sp>
         <p:sp>
           <p:nvSpPr>
-            <p:cNvPr id="104" name="rc104"/>
-            <p:cNvSpPr/>
-            <p:nvPr/>
-          </p:nvSpPr>
-          <p:spPr>
-            <a:xfrm>
-              <a:off x="5349081" y="1138809"/>
-              <a:ext cx="4571999" cy="5285232"/>
+            <p:cNvPr id="108" name="rc108"/>
+            <p:cNvSpPr/>
+            <p:nvPr/>
+          </p:nvSpPr>
+          <p:spPr>
+            <a:xfrm>
+              <a:off x="777081" y="3781425"/>
+              <a:ext cx="9144000" cy="2642616"/>
             </a:xfrm>
             <a:prstGeom prst="rect">
               <a:avLst/>
@@ -7253,14 +7425,14 @@
         </p:sp>
         <p:sp>
           <p:nvSpPr>
-            <p:cNvPr id="105" name="rc105"/>
-            <p:cNvSpPr/>
-            <p:nvPr/>
-          </p:nvSpPr>
-          <p:spPr>
-            <a:xfrm>
-              <a:off x="5749445" y="1434040"/>
-              <a:ext cx="2016229" cy="4580111"/>
+            <p:cNvPr id="109" name="rc109"/>
+            <p:cNvSpPr/>
+            <p:nvPr/>
+          </p:nvSpPr>
+          <p:spPr>
+            <a:xfrm>
+              <a:off x="1177445" y="4076656"/>
+              <a:ext cx="4302229" cy="1937495"/>
             </a:xfrm>
             <a:prstGeom prst="rect">
               <a:avLst/>
@@ -7279,27 +7451,27 @@
         </p:sp>
         <p:sp>
           <p:nvSpPr>
-            <p:cNvPr id="106" name="pl106"/>
-            <p:cNvSpPr/>
-            <p:nvPr/>
-          </p:nvSpPr>
-          <p:spPr>
-            <a:xfrm>
-              <a:off x="5749445" y="4834426"/>
-              <a:ext cx="2016229" cy="0"/>
-            </a:xfrm>
-            <a:custGeom>
-              <a:avLst/>
-              <a:pathLst>
-                <a:path w="2016229" h="0">
-                  <a:moveTo>
-                    <a:pt x="0" y="0"/>
-                  </a:moveTo>
-                  <a:lnTo>
-                    <a:pt x="2016229" y="0"/>
-                  </a:lnTo>
-                  <a:lnTo>
-                    <a:pt x="2016229" y="0"/>
+            <p:cNvPr id="110" name="pl110"/>
+            <p:cNvSpPr/>
+            <p:nvPr/>
+          </p:nvSpPr>
+          <p:spPr>
+            <a:xfrm>
+              <a:off x="1177445" y="5515100"/>
+              <a:ext cx="4302229" cy="0"/>
+            </a:xfrm>
+            <a:custGeom>
+              <a:avLst/>
+              <a:pathLst>
+                <a:path w="4302229" h="0">
+                  <a:moveTo>
+                    <a:pt x="0" y="0"/>
+                  </a:moveTo>
+                  <a:lnTo>
+                    <a:pt x="4302229" y="0"/>
+                  </a:lnTo>
+                  <a:lnTo>
+                    <a:pt x="4302229" y="0"/>
                   </a:lnTo>
                 </a:path>
               </a:pathLst>
@@ -7322,27 +7494,27 @@
         </p:sp>
         <p:sp>
           <p:nvSpPr>
-            <p:cNvPr id="107" name="pl107"/>
-            <p:cNvSpPr/>
-            <p:nvPr/>
-          </p:nvSpPr>
-          <p:spPr>
-            <a:xfrm>
-              <a:off x="5749445" y="3446513"/>
-              <a:ext cx="2016229" cy="0"/>
-            </a:xfrm>
-            <a:custGeom>
-              <a:avLst/>
-              <a:pathLst>
-                <a:path w="2016229" h="0">
-                  <a:moveTo>
-                    <a:pt x="0" y="0"/>
-                  </a:moveTo>
-                  <a:lnTo>
-                    <a:pt x="2016229" y="0"/>
-                  </a:lnTo>
-                  <a:lnTo>
-                    <a:pt x="2016229" y="0"/>
+            <p:cNvPr id="111" name="pl111"/>
+            <p:cNvSpPr/>
+            <p:nvPr/>
+          </p:nvSpPr>
+          <p:spPr>
+            <a:xfrm>
+              <a:off x="1177445" y="4927980"/>
+              <a:ext cx="4302229" cy="0"/>
+            </a:xfrm>
+            <a:custGeom>
+              <a:avLst/>
+              <a:pathLst>
+                <a:path w="4302229" h="0">
+                  <a:moveTo>
+                    <a:pt x="0" y="0"/>
+                  </a:moveTo>
+                  <a:lnTo>
+                    <a:pt x="4302229" y="0"/>
+                  </a:lnTo>
+                  <a:lnTo>
+                    <a:pt x="4302229" y="0"/>
                   </a:lnTo>
                 </a:path>
               </a:pathLst>
@@ -7365,27 +7537,27 @@
         </p:sp>
         <p:sp>
           <p:nvSpPr>
-            <p:cNvPr id="108" name="pl108"/>
-            <p:cNvSpPr/>
-            <p:nvPr/>
-          </p:nvSpPr>
-          <p:spPr>
-            <a:xfrm>
-              <a:off x="5749445" y="2058601"/>
-              <a:ext cx="2016229" cy="0"/>
-            </a:xfrm>
-            <a:custGeom>
-              <a:avLst/>
-              <a:pathLst>
-                <a:path w="2016229" h="0">
-                  <a:moveTo>
-                    <a:pt x="0" y="0"/>
-                  </a:moveTo>
-                  <a:lnTo>
-                    <a:pt x="2016229" y="0"/>
-                  </a:lnTo>
-                  <a:lnTo>
-                    <a:pt x="2016229" y="0"/>
+            <p:cNvPr id="112" name="pl112"/>
+            <p:cNvSpPr/>
+            <p:nvPr/>
+          </p:nvSpPr>
+          <p:spPr>
+            <a:xfrm>
+              <a:off x="1177445" y="4340860"/>
+              <a:ext cx="4302229" cy="0"/>
+            </a:xfrm>
+            <a:custGeom>
+              <a:avLst/>
+              <a:pathLst>
+                <a:path w="4302229" h="0">
+                  <a:moveTo>
+                    <a:pt x="0" y="0"/>
+                  </a:moveTo>
+                  <a:lnTo>
+                    <a:pt x="4302229" y="0"/>
+                  </a:lnTo>
+                  <a:lnTo>
+                    <a:pt x="4302229" y="0"/>
                   </a:lnTo>
                 </a:path>
               </a:pathLst>
@@ -7408,21 +7580,21 @@
         </p:sp>
         <p:sp>
           <p:nvSpPr>
-            <p:cNvPr id="109" name="pl109"/>
-            <p:cNvSpPr/>
-            <p:nvPr/>
-          </p:nvSpPr>
-          <p:spPr>
-            <a:xfrm>
-              <a:off x="5920178" y="1434040"/>
-              <a:ext cx="0" cy="4580111"/>
-            </a:xfrm>
-            <a:custGeom>
-              <a:avLst/>
-              <a:pathLst>
-                <a:path w="0" h="4580111">
-                  <a:moveTo>
-                    <a:pt x="0" y="4580111"/>
+            <p:cNvPr id="113" name="pl113"/>
+            <p:cNvSpPr/>
+            <p:nvPr/>
+          </p:nvSpPr>
+          <p:spPr>
+            <a:xfrm>
+              <a:off x="1541754" y="4076656"/>
+              <a:ext cx="0" cy="1937495"/>
+            </a:xfrm>
+            <a:custGeom>
+              <a:avLst/>
+              <a:pathLst>
+                <a:path w="0" h="1937495">
+                  <a:moveTo>
+                    <a:pt x="0" y="1937495"/>
                   </a:moveTo>
                   <a:lnTo>
                     <a:pt x="0" y="0"/>
@@ -7451,21 +7623,21 @@
         </p:sp>
         <p:sp>
           <p:nvSpPr>
-            <p:cNvPr id="110" name="pl110"/>
-            <p:cNvSpPr/>
-            <p:nvPr/>
-          </p:nvSpPr>
-          <p:spPr>
-            <a:xfrm>
-              <a:off x="6385390" y="1434040"/>
-              <a:ext cx="0" cy="4580111"/>
-            </a:xfrm>
-            <a:custGeom>
-              <a:avLst/>
-              <a:pathLst>
-                <a:path w="0" h="4580111">
-                  <a:moveTo>
-                    <a:pt x="0" y="4580111"/>
+            <p:cNvPr id="114" name="pl114"/>
+            <p:cNvSpPr/>
+            <p:nvPr/>
+          </p:nvSpPr>
+          <p:spPr>
+            <a:xfrm>
+              <a:off x="2534424" y="4076656"/>
+              <a:ext cx="0" cy="1937495"/>
+            </a:xfrm>
+            <a:custGeom>
+              <a:avLst/>
+              <a:pathLst>
+                <a:path w="0" h="1937495">
+                  <a:moveTo>
+                    <a:pt x="0" y="1937495"/>
                   </a:moveTo>
                   <a:lnTo>
                     <a:pt x="0" y="0"/>
@@ -7494,21 +7666,21 @@
         </p:sp>
         <p:sp>
           <p:nvSpPr>
-            <p:cNvPr id="111" name="pl111"/>
-            <p:cNvSpPr/>
-            <p:nvPr/>
-          </p:nvSpPr>
-          <p:spPr>
-            <a:xfrm>
-              <a:off x="6850602" y="1434040"/>
-              <a:ext cx="0" cy="4580111"/>
-            </a:xfrm>
-            <a:custGeom>
-              <a:avLst/>
-              <a:pathLst>
-                <a:path w="0" h="4580111">
-                  <a:moveTo>
-                    <a:pt x="0" y="4580111"/>
+            <p:cNvPr id="115" name="pl115"/>
+            <p:cNvSpPr/>
+            <p:nvPr/>
+          </p:nvSpPr>
+          <p:spPr>
+            <a:xfrm>
+              <a:off x="3527093" y="4076656"/>
+              <a:ext cx="0" cy="1937495"/>
+            </a:xfrm>
+            <a:custGeom>
+              <a:avLst/>
+              <a:pathLst>
+                <a:path w="0" h="1937495">
+                  <a:moveTo>
+                    <a:pt x="0" y="1937495"/>
                   </a:moveTo>
                   <a:lnTo>
                     <a:pt x="0" y="0"/>
@@ -7537,21 +7709,21 @@
         </p:sp>
         <p:sp>
           <p:nvSpPr>
-            <p:cNvPr id="112" name="pl112"/>
-            <p:cNvSpPr/>
-            <p:nvPr/>
-          </p:nvSpPr>
-          <p:spPr>
-            <a:xfrm>
-              <a:off x="7315814" y="1434040"/>
-              <a:ext cx="0" cy="4580111"/>
-            </a:xfrm>
-            <a:custGeom>
-              <a:avLst/>
-              <a:pathLst>
-                <a:path w="0" h="4580111">
-                  <a:moveTo>
-                    <a:pt x="0" y="4580111"/>
+            <p:cNvPr id="116" name="pl116"/>
+            <p:cNvSpPr/>
+            <p:nvPr/>
+          </p:nvSpPr>
+          <p:spPr>
+            <a:xfrm>
+              <a:off x="4519763" y="4076656"/>
+              <a:ext cx="0" cy="1937495"/>
+            </a:xfrm>
+            <a:custGeom>
+              <a:avLst/>
+              <a:pathLst>
+                <a:path w="0" h="1937495">
+                  <a:moveTo>
+                    <a:pt x="0" y="1937495"/>
                   </a:moveTo>
                   <a:lnTo>
                     <a:pt x="0" y="0"/>
@@ -7580,27 +7752,27 @@
         </p:sp>
         <p:sp>
           <p:nvSpPr>
-            <p:cNvPr id="113" name="pl113"/>
-            <p:cNvSpPr/>
-            <p:nvPr/>
-          </p:nvSpPr>
-          <p:spPr>
-            <a:xfrm>
-              <a:off x="5749445" y="5528382"/>
-              <a:ext cx="2016229" cy="0"/>
-            </a:xfrm>
-            <a:custGeom>
-              <a:avLst/>
-              <a:pathLst>
-                <a:path w="2016229" h="0">
-                  <a:moveTo>
-                    <a:pt x="0" y="0"/>
-                  </a:moveTo>
-                  <a:lnTo>
-                    <a:pt x="2016229" y="0"/>
-                  </a:lnTo>
-                  <a:lnTo>
-                    <a:pt x="2016229" y="0"/>
+            <p:cNvPr id="117" name="pl117"/>
+            <p:cNvSpPr/>
+            <p:nvPr/>
+          </p:nvSpPr>
+          <p:spPr>
+            <a:xfrm>
+              <a:off x="1177445" y="5808660"/>
+              <a:ext cx="4302229" cy="0"/>
+            </a:xfrm>
+            <a:custGeom>
+              <a:avLst/>
+              <a:pathLst>
+                <a:path w="4302229" h="0">
+                  <a:moveTo>
+                    <a:pt x="0" y="0"/>
+                  </a:moveTo>
+                  <a:lnTo>
+                    <a:pt x="4302229" y="0"/>
+                  </a:lnTo>
+                  <a:lnTo>
+                    <a:pt x="4302229" y="0"/>
                   </a:lnTo>
                 </a:path>
               </a:pathLst>
@@ -7623,27 +7795,27 @@
         </p:sp>
         <p:sp>
           <p:nvSpPr>
-            <p:cNvPr id="114" name="pl114"/>
-            <p:cNvSpPr/>
-            <p:nvPr/>
-          </p:nvSpPr>
-          <p:spPr>
-            <a:xfrm>
-              <a:off x="5749445" y="4140470"/>
-              <a:ext cx="2016229" cy="0"/>
-            </a:xfrm>
-            <a:custGeom>
-              <a:avLst/>
-              <a:pathLst>
-                <a:path w="2016229" h="0">
-                  <a:moveTo>
-                    <a:pt x="0" y="0"/>
-                  </a:moveTo>
-                  <a:lnTo>
-                    <a:pt x="2016229" y="0"/>
-                  </a:lnTo>
-                  <a:lnTo>
-                    <a:pt x="2016229" y="0"/>
+            <p:cNvPr id="118" name="pl118"/>
+            <p:cNvSpPr/>
+            <p:nvPr/>
+          </p:nvSpPr>
+          <p:spPr>
+            <a:xfrm>
+              <a:off x="1177445" y="5221540"/>
+              <a:ext cx="4302229" cy="0"/>
+            </a:xfrm>
+            <a:custGeom>
+              <a:avLst/>
+              <a:pathLst>
+                <a:path w="4302229" h="0">
+                  <a:moveTo>
+                    <a:pt x="0" y="0"/>
+                  </a:moveTo>
+                  <a:lnTo>
+                    <a:pt x="4302229" y="0"/>
+                  </a:lnTo>
+                  <a:lnTo>
+                    <a:pt x="4302229" y="0"/>
                   </a:lnTo>
                 </a:path>
               </a:pathLst>
@@ -7666,27 +7838,27 @@
         </p:sp>
         <p:sp>
           <p:nvSpPr>
-            <p:cNvPr id="115" name="pl115"/>
-            <p:cNvSpPr/>
-            <p:nvPr/>
-          </p:nvSpPr>
-          <p:spPr>
-            <a:xfrm>
-              <a:off x="5749445" y="2752557"/>
-              <a:ext cx="2016229" cy="0"/>
-            </a:xfrm>
-            <a:custGeom>
-              <a:avLst/>
-              <a:pathLst>
-                <a:path w="2016229" h="0">
-                  <a:moveTo>
-                    <a:pt x="0" y="0"/>
-                  </a:moveTo>
-                  <a:lnTo>
-                    <a:pt x="2016229" y="0"/>
-                  </a:lnTo>
-                  <a:lnTo>
-                    <a:pt x="2016229" y="0"/>
+            <p:cNvPr id="119" name="pl119"/>
+            <p:cNvSpPr/>
+            <p:nvPr/>
+          </p:nvSpPr>
+          <p:spPr>
+            <a:xfrm>
+              <a:off x="1177445" y="4634420"/>
+              <a:ext cx="4302229" cy="0"/>
+            </a:xfrm>
+            <a:custGeom>
+              <a:avLst/>
+              <a:pathLst>
+                <a:path w="4302229" h="0">
+                  <a:moveTo>
+                    <a:pt x="0" y="0"/>
+                  </a:moveTo>
+                  <a:lnTo>
+                    <a:pt x="4302229" y="0"/>
+                  </a:lnTo>
+                  <a:lnTo>
+                    <a:pt x="4302229" y="0"/>
                   </a:lnTo>
                 </a:path>
               </a:pathLst>
@@ -7709,21 +7881,21 @@
         </p:sp>
         <p:sp>
           <p:nvSpPr>
-            <p:cNvPr id="116" name="pl116"/>
-            <p:cNvSpPr/>
-            <p:nvPr/>
-          </p:nvSpPr>
-          <p:spPr>
-            <a:xfrm>
-              <a:off x="6152784" y="1434040"/>
-              <a:ext cx="0" cy="4580111"/>
-            </a:xfrm>
-            <a:custGeom>
-              <a:avLst/>
-              <a:pathLst>
-                <a:path w="0" h="4580111">
-                  <a:moveTo>
-                    <a:pt x="0" y="4580111"/>
+            <p:cNvPr id="120" name="pl120"/>
+            <p:cNvSpPr/>
+            <p:nvPr/>
+          </p:nvSpPr>
+          <p:spPr>
+            <a:xfrm>
+              <a:off x="2038089" y="4076656"/>
+              <a:ext cx="0" cy="1937495"/>
+            </a:xfrm>
+            <a:custGeom>
+              <a:avLst/>
+              <a:pathLst>
+                <a:path w="0" h="1937495">
+                  <a:moveTo>
+                    <a:pt x="0" y="1937495"/>
                   </a:moveTo>
                   <a:lnTo>
                     <a:pt x="0" y="0"/>
@@ -7752,21 +7924,21 @@
         </p:sp>
         <p:sp>
           <p:nvSpPr>
-            <p:cNvPr id="117" name="pl117"/>
-            <p:cNvSpPr/>
-            <p:nvPr/>
-          </p:nvSpPr>
-          <p:spPr>
-            <a:xfrm>
-              <a:off x="6617996" y="1434040"/>
-              <a:ext cx="0" cy="4580111"/>
-            </a:xfrm>
-            <a:custGeom>
-              <a:avLst/>
-              <a:pathLst>
-                <a:path w="0" h="4580111">
-                  <a:moveTo>
-                    <a:pt x="0" y="4580111"/>
+            <p:cNvPr id="121" name="pl121"/>
+            <p:cNvSpPr/>
+            <p:nvPr/>
+          </p:nvSpPr>
+          <p:spPr>
+            <a:xfrm>
+              <a:off x="3030759" y="4076656"/>
+              <a:ext cx="0" cy="1937495"/>
+            </a:xfrm>
+            <a:custGeom>
+              <a:avLst/>
+              <a:pathLst>
+                <a:path w="0" h="1937495">
+                  <a:moveTo>
+                    <a:pt x="0" y="1937495"/>
                   </a:moveTo>
                   <a:lnTo>
                     <a:pt x="0" y="0"/>
@@ -7795,21 +7967,21 @@
         </p:sp>
         <p:sp>
           <p:nvSpPr>
-            <p:cNvPr id="118" name="pl118"/>
-            <p:cNvSpPr/>
-            <p:nvPr/>
-          </p:nvSpPr>
-          <p:spPr>
-            <a:xfrm>
-              <a:off x="7083208" y="1434040"/>
-              <a:ext cx="0" cy="4580111"/>
-            </a:xfrm>
-            <a:custGeom>
-              <a:avLst/>
-              <a:pathLst>
-                <a:path w="0" h="4580111">
-                  <a:moveTo>
-                    <a:pt x="0" y="4580111"/>
+            <p:cNvPr id="122" name="pl122"/>
+            <p:cNvSpPr/>
+            <p:nvPr/>
+          </p:nvSpPr>
+          <p:spPr>
+            <a:xfrm>
+              <a:off x="4023428" y="4076656"/>
+              <a:ext cx="0" cy="1937495"/>
+            </a:xfrm>
+            <a:custGeom>
+              <a:avLst/>
+              <a:pathLst>
+                <a:path w="0" h="1937495">
+                  <a:moveTo>
+                    <a:pt x="0" y="1937495"/>
                   </a:moveTo>
                   <a:lnTo>
                     <a:pt x="0" y="0"/>
@@ -7838,21 +8010,21 @@
         </p:sp>
         <p:sp>
           <p:nvSpPr>
-            <p:cNvPr id="119" name="pl119"/>
-            <p:cNvSpPr/>
-            <p:nvPr/>
-          </p:nvSpPr>
-          <p:spPr>
-            <a:xfrm>
-              <a:off x="7548420" y="1434040"/>
-              <a:ext cx="0" cy="4580111"/>
-            </a:xfrm>
-            <a:custGeom>
-              <a:avLst/>
-              <a:pathLst>
-                <a:path w="0" h="4580111">
-                  <a:moveTo>
-                    <a:pt x="0" y="4580111"/>
+            <p:cNvPr id="123" name="pl123"/>
+            <p:cNvSpPr/>
+            <p:nvPr/>
+          </p:nvSpPr>
+          <p:spPr>
+            <a:xfrm>
+              <a:off x="5016097" y="4076656"/>
+              <a:ext cx="0" cy="1937495"/>
+            </a:xfrm>
+            <a:custGeom>
+              <a:avLst/>
+              <a:pathLst>
+                <a:path w="0" h="1937495">
+                  <a:moveTo>
+                    <a:pt x="0" y="1937495"/>
                   </a:moveTo>
                   <a:lnTo>
                     <a:pt x="0" y="0"/>
@@ -7881,13 +8053,13 @@
         </p:sp>
         <p:sp>
           <p:nvSpPr>
-            <p:cNvPr id="120" name="pt120"/>
-            <p:cNvSpPr/>
-            <p:nvPr/>
-          </p:nvSpPr>
-          <p:spPr>
-            <a:xfrm>
-              <a:off x="5941873" y="3529461"/>
+            <p:cNvPr id="124" name="pt124"/>
+            <p:cNvSpPr/>
+            <p:nvPr/>
+          </p:nvSpPr>
+          <p:spPr>
+            <a:xfrm>
+              <a:off x="1616195" y="4948745"/>
               <a:ext cx="49651" cy="49651"/>
             </a:xfrm>
             <a:prstGeom prst="ellipse">
@@ -7916,13 +8088,13 @@
         </p:sp>
         <p:sp>
           <p:nvSpPr>
-            <p:cNvPr id="121" name="pt121"/>
-            <p:cNvSpPr/>
-            <p:nvPr/>
-          </p:nvSpPr>
-          <p:spPr>
-            <a:xfrm>
-              <a:off x="6314043" y="3460421"/>
+            <p:cNvPr id="125" name="pt125"/>
+            <p:cNvSpPr/>
+            <p:nvPr/>
+          </p:nvSpPr>
+          <p:spPr>
+            <a:xfrm>
+              <a:off x="2410331" y="4919539"/>
               <a:ext cx="49651" cy="49651"/>
             </a:xfrm>
             <a:prstGeom prst="ellipse">
@@ -7951,13 +8123,13 @@
         </p:sp>
         <p:sp>
           <p:nvSpPr>
-            <p:cNvPr id="122" name="pt122"/>
-            <p:cNvSpPr/>
-            <p:nvPr/>
-          </p:nvSpPr>
-          <p:spPr>
-            <a:xfrm>
-              <a:off x="6593170" y="3442615"/>
+            <p:cNvPr id="126" name="pt126"/>
+            <p:cNvSpPr/>
+            <p:nvPr/>
+          </p:nvSpPr>
+          <p:spPr>
+            <a:xfrm>
+              <a:off x="3005933" y="4912007"/>
               <a:ext cx="49651" cy="49651"/>
             </a:xfrm>
             <a:prstGeom prst="ellipse">
@@ -7986,13 +8158,13 @@
         </p:sp>
         <p:sp>
           <p:nvSpPr>
-            <p:cNvPr id="123" name="pt123"/>
-            <p:cNvSpPr/>
-            <p:nvPr/>
-          </p:nvSpPr>
-          <p:spPr>
-            <a:xfrm>
-              <a:off x="7058382" y="3420509"/>
+            <p:cNvPr id="127" name="pt127"/>
+            <p:cNvSpPr/>
+            <p:nvPr/>
+          </p:nvSpPr>
+          <p:spPr>
+            <a:xfrm>
+              <a:off x="3998602" y="4902656"/>
               <a:ext cx="49651" cy="49651"/>
             </a:xfrm>
             <a:prstGeom prst="ellipse">
@@ -8021,13 +8193,13 @@
         </p:sp>
         <p:sp>
           <p:nvSpPr>
-            <p:cNvPr id="124" name="pt124"/>
-            <p:cNvSpPr/>
-            <p:nvPr/>
-          </p:nvSpPr>
-          <p:spPr>
-            <a:xfrm>
-              <a:off x="7523594" y="3429082"/>
+            <p:cNvPr id="128" name="pt128"/>
+            <p:cNvSpPr/>
+            <p:nvPr/>
+          </p:nvSpPr>
+          <p:spPr>
+            <a:xfrm>
+              <a:off x="4991271" y="4906282"/>
               <a:ext cx="49651" cy="49651"/>
             </a:xfrm>
             <a:prstGeom prst="ellipse">
@@ -8056,24 +8228,24 @@
         </p:sp>
         <p:sp>
           <p:nvSpPr>
-            <p:cNvPr id="125" name="pl125"/>
-            <p:cNvSpPr/>
-            <p:nvPr/>
-          </p:nvSpPr>
-          <p:spPr>
-            <a:xfrm>
-              <a:off x="5841092" y="2776298"/>
-              <a:ext cx="251214" cy="0"/>
-            </a:xfrm>
-            <a:custGeom>
-              <a:avLst/>
-              <a:pathLst>
-                <a:path w="251214" h="0">
-                  <a:moveTo>
-                    <a:pt x="0" y="0"/>
-                  </a:moveTo>
-                  <a:lnTo>
-                    <a:pt x="251214" y="0"/>
+            <p:cNvPr id="129" name="pl129"/>
+            <p:cNvSpPr/>
+            <p:nvPr/>
+          </p:nvSpPr>
+          <p:spPr>
+            <a:xfrm>
+              <a:off x="1373001" y="4644463"/>
+              <a:ext cx="536041" cy="0"/>
+            </a:xfrm>
+            <a:custGeom>
+              <a:avLst/>
+              <a:pathLst>
+                <a:path w="536041" h="0">
+                  <a:moveTo>
+                    <a:pt x="0" y="0"/>
+                  </a:moveTo>
+                  <a:lnTo>
+                    <a:pt x="536041" y="0"/>
                   </a:lnTo>
                 </a:path>
               </a:pathLst>
@@ -8096,24 +8268,24 @@
         </p:sp>
         <p:sp>
           <p:nvSpPr>
-            <p:cNvPr id="126" name="pl126"/>
-            <p:cNvSpPr/>
-            <p:nvPr/>
-          </p:nvSpPr>
-          <p:spPr>
-            <a:xfrm>
-              <a:off x="5966699" y="2776298"/>
-              <a:ext cx="0" cy="1334099"/>
-            </a:xfrm>
-            <a:custGeom>
-              <a:avLst/>
-              <a:pathLst>
-                <a:path w="0" h="1334099">
-                  <a:moveTo>
-                    <a:pt x="0" y="0"/>
-                  </a:moveTo>
-                  <a:lnTo>
-                    <a:pt x="0" y="1334099"/>
+            <p:cNvPr id="130" name="pl130"/>
+            <p:cNvSpPr/>
+            <p:nvPr/>
+          </p:nvSpPr>
+          <p:spPr>
+            <a:xfrm>
+              <a:off x="1641021" y="4644463"/>
+              <a:ext cx="0" cy="564355"/>
+            </a:xfrm>
+            <a:custGeom>
+              <a:avLst/>
+              <a:pathLst>
+                <a:path w="0" h="564355">
+                  <a:moveTo>
+                    <a:pt x="0" y="0"/>
+                  </a:moveTo>
+                  <a:lnTo>
+                    <a:pt x="0" y="564355"/>
                   </a:lnTo>
                 </a:path>
               </a:pathLst>
@@ -8136,24 +8308,24 @@
         </p:sp>
         <p:sp>
           <p:nvSpPr>
-            <p:cNvPr id="127" name="pl127"/>
-            <p:cNvSpPr/>
-            <p:nvPr/>
-          </p:nvSpPr>
-          <p:spPr>
-            <a:xfrm>
-              <a:off x="5841092" y="4110397"/>
-              <a:ext cx="251214" cy="0"/>
-            </a:xfrm>
-            <a:custGeom>
-              <a:avLst/>
-              <a:pathLst>
-                <a:path w="251214" h="0">
-                  <a:moveTo>
-                    <a:pt x="0" y="0"/>
-                  </a:moveTo>
-                  <a:lnTo>
-                    <a:pt x="251214" y="0"/>
+            <p:cNvPr id="131" name="pl131"/>
+            <p:cNvSpPr/>
+            <p:nvPr/>
+          </p:nvSpPr>
+          <p:spPr>
+            <a:xfrm>
+              <a:off x="1373001" y="5208818"/>
+              <a:ext cx="536041" cy="0"/>
+            </a:xfrm>
+            <a:custGeom>
+              <a:avLst/>
+              <a:pathLst>
+                <a:path w="536041" h="0">
+                  <a:moveTo>
+                    <a:pt x="0" y="0"/>
+                  </a:moveTo>
+                  <a:lnTo>
+                    <a:pt x="536041" y="0"/>
                   </a:lnTo>
                 </a:path>
               </a:pathLst>
@@ -8176,24 +8348,24 @@
         </p:sp>
         <p:sp>
           <p:nvSpPr>
-            <p:cNvPr id="128" name="pl128"/>
-            <p:cNvSpPr/>
-            <p:nvPr/>
-          </p:nvSpPr>
-          <p:spPr>
-            <a:xfrm>
-              <a:off x="6213261" y="2351321"/>
-              <a:ext cx="251214" cy="0"/>
-            </a:xfrm>
-            <a:custGeom>
-              <a:avLst/>
-              <a:pathLst>
-                <a:path w="251214" h="0">
-                  <a:moveTo>
-                    <a:pt x="0" y="0"/>
-                  </a:moveTo>
-                  <a:lnTo>
-                    <a:pt x="251214" y="0"/>
+            <p:cNvPr id="132" name="pl132"/>
+            <p:cNvSpPr/>
+            <p:nvPr/>
+          </p:nvSpPr>
+          <p:spPr>
+            <a:xfrm>
+              <a:off x="2167136" y="4464688"/>
+              <a:ext cx="536041" cy="0"/>
+            </a:xfrm>
+            <a:custGeom>
+              <a:avLst/>
+              <a:pathLst>
+                <a:path w="536041" h="0">
+                  <a:moveTo>
+                    <a:pt x="0" y="0"/>
+                  </a:moveTo>
+                  <a:lnTo>
+                    <a:pt x="536041" y="0"/>
                   </a:lnTo>
                 </a:path>
               </a:pathLst>
@@ -8216,24 +8388,24 @@
         </p:sp>
         <p:sp>
           <p:nvSpPr>
-            <p:cNvPr id="129" name="pl129"/>
-            <p:cNvSpPr/>
-            <p:nvPr/>
-          </p:nvSpPr>
-          <p:spPr>
-            <a:xfrm>
-              <a:off x="6338868" y="2351321"/>
-              <a:ext cx="0" cy="1980359"/>
-            </a:xfrm>
-            <a:custGeom>
-              <a:avLst/>
-              <a:pathLst>
-                <a:path w="0" h="1980359">
-                  <a:moveTo>
-                    <a:pt x="0" y="0"/>
-                  </a:moveTo>
-                  <a:lnTo>
-                    <a:pt x="0" y="1980359"/>
+            <p:cNvPr id="133" name="pl133"/>
+            <p:cNvSpPr/>
+            <p:nvPr/>
+          </p:nvSpPr>
+          <p:spPr>
+            <a:xfrm>
+              <a:off x="2435157" y="4464688"/>
+              <a:ext cx="0" cy="837738"/>
+            </a:xfrm>
+            <a:custGeom>
+              <a:avLst/>
+              <a:pathLst>
+                <a:path w="0" h="837738">
+                  <a:moveTo>
+                    <a:pt x="0" y="0"/>
+                  </a:moveTo>
+                  <a:lnTo>
+                    <a:pt x="0" y="837738"/>
                   </a:lnTo>
                 </a:path>
               </a:pathLst>
@@ -8256,24 +8428,24 @@
         </p:sp>
         <p:sp>
           <p:nvSpPr>
-            <p:cNvPr id="130" name="pl130"/>
-            <p:cNvSpPr/>
-            <p:nvPr/>
-          </p:nvSpPr>
-          <p:spPr>
-            <a:xfrm>
-              <a:off x="6213261" y="4331681"/>
-              <a:ext cx="251214" cy="0"/>
-            </a:xfrm>
-            <a:custGeom>
-              <a:avLst/>
-              <a:pathLst>
-                <a:path w="251214" h="0">
-                  <a:moveTo>
-                    <a:pt x="0" y="0"/>
-                  </a:moveTo>
-                  <a:lnTo>
-                    <a:pt x="251214" y="0"/>
+            <p:cNvPr id="134" name="pl134"/>
+            <p:cNvSpPr/>
+            <p:nvPr/>
+          </p:nvSpPr>
+          <p:spPr>
+            <a:xfrm>
+              <a:off x="2167136" y="5302427"/>
+              <a:ext cx="536041" cy="0"/>
+            </a:xfrm>
+            <a:custGeom>
+              <a:avLst/>
+              <a:pathLst>
+                <a:path w="536041" h="0">
+                  <a:moveTo>
+                    <a:pt x="0" y="0"/>
+                  </a:moveTo>
+                  <a:lnTo>
+                    <a:pt x="536041" y="0"/>
                   </a:lnTo>
                 </a:path>
               </a:pathLst>
@@ -8296,24 +8468,24 @@
         </p:sp>
         <p:sp>
           <p:nvSpPr>
-            <p:cNvPr id="131" name="pl131"/>
-            <p:cNvSpPr/>
-            <p:nvPr/>
-          </p:nvSpPr>
-          <p:spPr>
-            <a:xfrm>
-              <a:off x="6492388" y="2518768"/>
-              <a:ext cx="251214" cy="0"/>
-            </a:xfrm>
-            <a:custGeom>
-              <a:avLst/>
-              <a:pathLst>
-                <a:path w="251214" h="0">
-                  <a:moveTo>
-                    <a:pt x="0" y="0"/>
-                  </a:moveTo>
-                  <a:lnTo>
-                    <a:pt x="251214" y="0"/>
+            <p:cNvPr id="135" name="pl135"/>
+            <p:cNvSpPr/>
+            <p:nvPr/>
+          </p:nvSpPr>
+          <p:spPr>
+            <a:xfrm>
+              <a:off x="2762738" y="4535522"/>
+              <a:ext cx="536041" cy="0"/>
+            </a:xfrm>
+            <a:custGeom>
+              <a:avLst/>
+              <a:pathLst>
+                <a:path w="536041" h="0">
+                  <a:moveTo>
+                    <a:pt x="0" y="0"/>
+                  </a:moveTo>
+                  <a:lnTo>
+                    <a:pt x="536041" y="0"/>
                   </a:lnTo>
                 </a:path>
               </a:pathLst>
@@ -8336,24 +8508,24 @@
         </p:sp>
         <p:sp>
           <p:nvSpPr>
-            <p:cNvPr id="132" name="pl132"/>
-            <p:cNvSpPr/>
-            <p:nvPr/>
-          </p:nvSpPr>
-          <p:spPr>
-            <a:xfrm>
-              <a:off x="6617996" y="2518768"/>
-              <a:ext cx="0" cy="1572654"/>
-            </a:xfrm>
-            <a:custGeom>
-              <a:avLst/>
-              <a:pathLst>
-                <a:path w="0" h="1572654">
-                  <a:moveTo>
-                    <a:pt x="0" y="0"/>
-                  </a:moveTo>
-                  <a:lnTo>
-                    <a:pt x="0" y="1572654"/>
+            <p:cNvPr id="136" name="pl136"/>
+            <p:cNvSpPr/>
+            <p:nvPr/>
+          </p:nvSpPr>
+          <p:spPr>
+            <a:xfrm>
+              <a:off x="3030759" y="4535522"/>
+              <a:ext cx="0" cy="665269"/>
+            </a:xfrm>
+            <a:custGeom>
+              <a:avLst/>
+              <a:pathLst>
+                <a:path w="0" h="665269">
+                  <a:moveTo>
+                    <a:pt x="0" y="0"/>
+                  </a:moveTo>
+                  <a:lnTo>
+                    <a:pt x="0" y="665269"/>
                   </a:lnTo>
                 </a:path>
               </a:pathLst>
@@ -8376,24 +8548,24 @@
         </p:sp>
         <p:sp>
           <p:nvSpPr>
-            <p:cNvPr id="133" name="pl133"/>
-            <p:cNvSpPr/>
-            <p:nvPr/>
-          </p:nvSpPr>
-          <p:spPr>
-            <a:xfrm>
-              <a:off x="6492388" y="4091423"/>
-              <a:ext cx="251214" cy="0"/>
-            </a:xfrm>
-            <a:custGeom>
-              <a:avLst/>
-              <a:pathLst>
-                <a:path w="251214" h="0">
-                  <a:moveTo>
-                    <a:pt x="0" y="0"/>
-                  </a:moveTo>
-                  <a:lnTo>
-                    <a:pt x="251214" y="0"/>
+            <p:cNvPr id="137" name="pl137"/>
+            <p:cNvSpPr/>
+            <p:nvPr/>
+          </p:nvSpPr>
+          <p:spPr>
+            <a:xfrm>
+              <a:off x="2762738" y="5200792"/>
+              <a:ext cx="536041" cy="0"/>
+            </a:xfrm>
+            <a:custGeom>
+              <a:avLst/>
+              <a:pathLst>
+                <a:path w="536041" h="0">
+                  <a:moveTo>
+                    <a:pt x="0" y="0"/>
+                  </a:moveTo>
+                  <a:lnTo>
+                    <a:pt x="536041" y="0"/>
                   </a:lnTo>
                 </a:path>
               </a:pathLst>
@@ -8416,24 +8588,24 @@
         </p:sp>
         <p:sp>
           <p:nvSpPr>
-            <p:cNvPr id="134" name="pl134"/>
-            <p:cNvSpPr/>
-            <p:nvPr/>
-          </p:nvSpPr>
-          <p:spPr>
-            <a:xfrm>
-              <a:off x="7422813" y="5644065"/>
-              <a:ext cx="251214" cy="0"/>
-            </a:xfrm>
-            <a:custGeom>
-              <a:avLst/>
-              <a:pathLst>
-                <a:path w="251214" h="0">
-                  <a:moveTo>
-                    <a:pt x="0" y="0"/>
-                  </a:moveTo>
-                  <a:lnTo>
-                    <a:pt x="251214" y="0"/>
+            <p:cNvPr id="138" name="pl138"/>
+            <p:cNvSpPr/>
+            <p:nvPr/>
+          </p:nvSpPr>
+          <p:spPr>
+            <a:xfrm>
+              <a:off x="4748077" y="5857596"/>
+              <a:ext cx="536041" cy="0"/>
+            </a:xfrm>
+            <a:custGeom>
+              <a:avLst/>
+              <a:pathLst>
+                <a:path w="536041" h="0">
+                  <a:moveTo>
+                    <a:pt x="0" y="0"/>
+                  </a:moveTo>
+                  <a:lnTo>
+                    <a:pt x="536041" y="0"/>
                   </a:lnTo>
                 </a:path>
               </a:pathLst>
@@ -8456,27 +8628,27 @@
         </p:sp>
         <p:sp>
           <p:nvSpPr>
-            <p:cNvPr id="135" name="pl135"/>
-            <p:cNvSpPr/>
-            <p:nvPr/>
-          </p:nvSpPr>
-          <p:spPr>
-            <a:xfrm>
-              <a:off x="5749445" y="3585305"/>
-              <a:ext cx="2016229" cy="0"/>
-            </a:xfrm>
-            <a:custGeom>
-              <a:avLst/>
-              <a:pathLst>
-                <a:path w="2016229" h="0">
-                  <a:moveTo>
-                    <a:pt x="0" y="0"/>
-                  </a:moveTo>
-                  <a:lnTo>
-                    <a:pt x="2016229" y="0"/>
-                  </a:lnTo>
-                  <a:lnTo>
-                    <a:pt x="2016229" y="0"/>
+            <p:cNvPr id="139" name="pl139"/>
+            <p:cNvSpPr/>
+            <p:nvPr/>
+          </p:nvSpPr>
+          <p:spPr>
+            <a:xfrm>
+              <a:off x="1177445" y="4974949"/>
+              <a:ext cx="4302229" cy="0"/>
+            </a:xfrm>
+            <a:custGeom>
+              <a:avLst/>
+              <a:pathLst>
+                <a:path w="4302229" h="0">
+                  <a:moveTo>
+                    <a:pt x="0" y="0"/>
+                  </a:moveTo>
+                  <a:lnTo>
+                    <a:pt x="4302229" y="0"/>
+                  </a:lnTo>
+                  <a:lnTo>
+                    <a:pt x="4302229" y="0"/>
                   </a:lnTo>
                 </a:path>
               </a:pathLst>
@@ -8499,14 +8671,100 @@
         </p:sp>
         <p:sp>
           <p:nvSpPr>
-            <p:cNvPr id="136" name="rc136"/>
-            <p:cNvSpPr/>
-            <p:nvPr/>
-          </p:nvSpPr>
-          <p:spPr>
-            <a:xfrm>
-              <a:off x="5749445" y="1434040"/>
-              <a:ext cx="2016229" cy="4580111"/>
+            <p:cNvPr id="140" name="pl140"/>
+            <p:cNvSpPr/>
+            <p:nvPr/>
+          </p:nvSpPr>
+          <p:spPr>
+            <a:xfrm>
+              <a:off x="1177445" y="4728359"/>
+              <a:ext cx="4302229" cy="0"/>
+            </a:xfrm>
+            <a:custGeom>
+              <a:avLst/>
+              <a:pathLst>
+                <a:path w="4302229" h="0">
+                  <a:moveTo>
+                    <a:pt x="0" y="0"/>
+                  </a:moveTo>
+                  <a:lnTo>
+                    <a:pt x="4302229" y="0"/>
+                  </a:lnTo>
+                  <a:lnTo>
+                    <a:pt x="4302229" y="0"/>
+                  </a:lnTo>
+                </a:path>
+              </a:pathLst>
+            </a:custGeom>
+            <a:ln w="13550" cap="flat">
+              <a:solidFill>
+                <a:srgbClr val="B3B3B3">
+                  <a:alpha val="100000"/>
+                </a:srgbClr>
+              </a:solidFill>
+              <a:prstDash val="dash"/>
+              <a:round/>
+            </a:ln>
+          </p:spPr>
+          <p:txBody>
+            <a:bodyPr/>
+            <a:lstStyle/>
+            <a:p/>
+          </p:txBody>
+        </p:sp>
+        <p:sp>
+          <p:nvSpPr>
+            <p:cNvPr id="141" name="pl141"/>
+            <p:cNvSpPr/>
+            <p:nvPr/>
+          </p:nvSpPr>
+          <p:spPr>
+            <a:xfrm>
+              <a:off x="1177445" y="5221540"/>
+              <a:ext cx="4302229" cy="0"/>
+            </a:xfrm>
+            <a:custGeom>
+              <a:avLst/>
+              <a:pathLst>
+                <a:path w="4302229" h="0">
+                  <a:moveTo>
+                    <a:pt x="0" y="0"/>
+                  </a:moveTo>
+                  <a:lnTo>
+                    <a:pt x="4302229" y="0"/>
+                  </a:lnTo>
+                  <a:lnTo>
+                    <a:pt x="4302229" y="0"/>
+                  </a:lnTo>
+                </a:path>
+              </a:pathLst>
+            </a:custGeom>
+            <a:ln w="13550" cap="flat">
+              <a:solidFill>
+                <a:srgbClr val="B3B3B3">
+                  <a:alpha val="100000"/>
+                </a:srgbClr>
+              </a:solidFill>
+              <a:prstDash val="dash"/>
+              <a:round/>
+            </a:ln>
+          </p:spPr>
+          <p:txBody>
+            <a:bodyPr/>
+            <a:lstStyle/>
+            <a:p/>
+          </p:txBody>
+        </p:sp>
+        <p:sp>
+          <p:nvSpPr>
+            <p:cNvPr id="142" name="rc142"/>
+            <p:cNvSpPr/>
+            <p:nvPr/>
+          </p:nvSpPr>
+          <p:spPr>
+            <a:xfrm>
+              <a:off x="1177445" y="4076656"/>
+              <a:ext cx="4302229" cy="1937495"/>
             </a:xfrm>
             <a:prstGeom prst="rect">
               <a:avLst/>
@@ -8529,14 +8787,14 @@
         </p:sp>
         <p:sp>
           <p:nvSpPr>
-            <p:cNvPr id="137" name="rc137"/>
-            <p:cNvSpPr/>
-            <p:nvPr/>
-          </p:nvSpPr>
-          <p:spPr>
-            <a:xfrm>
-              <a:off x="7835263" y="1434040"/>
-              <a:ext cx="2016229" cy="4580111"/>
+            <p:cNvPr id="143" name="rc143"/>
+            <p:cNvSpPr/>
+            <p:nvPr/>
+          </p:nvSpPr>
+          <p:spPr>
+            <a:xfrm>
+              <a:off x="5549263" y="4076656"/>
+              <a:ext cx="4302229" cy="1937495"/>
             </a:xfrm>
             <a:prstGeom prst="rect">
               <a:avLst/>
@@ -8555,27 +8813,27 @@
         </p:sp>
         <p:sp>
           <p:nvSpPr>
-            <p:cNvPr id="138" name="pl138"/>
-            <p:cNvSpPr/>
-            <p:nvPr/>
-          </p:nvSpPr>
-          <p:spPr>
-            <a:xfrm>
-              <a:off x="7835263" y="4834426"/>
-              <a:ext cx="2016229" cy="0"/>
-            </a:xfrm>
-            <a:custGeom>
-              <a:avLst/>
-              <a:pathLst>
-                <a:path w="2016229" h="0">
-                  <a:moveTo>
-                    <a:pt x="0" y="0"/>
-                  </a:moveTo>
-                  <a:lnTo>
-                    <a:pt x="2016229" y="0"/>
-                  </a:lnTo>
-                  <a:lnTo>
-                    <a:pt x="2016229" y="0"/>
+            <p:cNvPr id="144" name="pl144"/>
+            <p:cNvSpPr/>
+            <p:nvPr/>
+          </p:nvSpPr>
+          <p:spPr>
+            <a:xfrm>
+              <a:off x="5549263" y="5515100"/>
+              <a:ext cx="4302229" cy="0"/>
+            </a:xfrm>
+            <a:custGeom>
+              <a:avLst/>
+              <a:pathLst>
+                <a:path w="4302229" h="0">
+                  <a:moveTo>
+                    <a:pt x="0" y="0"/>
+                  </a:moveTo>
+                  <a:lnTo>
+                    <a:pt x="4302229" y="0"/>
+                  </a:lnTo>
+                  <a:lnTo>
+                    <a:pt x="4302229" y="0"/>
                   </a:lnTo>
                 </a:path>
               </a:pathLst>
@@ -8598,27 +8856,27 @@
         </p:sp>
         <p:sp>
           <p:nvSpPr>
-            <p:cNvPr id="139" name="pl139"/>
-            <p:cNvSpPr/>
-            <p:nvPr/>
-          </p:nvSpPr>
-          <p:spPr>
-            <a:xfrm>
-              <a:off x="7835263" y="3446513"/>
-              <a:ext cx="2016229" cy="0"/>
-            </a:xfrm>
-            <a:custGeom>
-              <a:avLst/>
-              <a:pathLst>
-                <a:path w="2016229" h="0">
-                  <a:moveTo>
-                    <a:pt x="0" y="0"/>
-                  </a:moveTo>
-                  <a:lnTo>
-                    <a:pt x="2016229" y="0"/>
-                  </a:lnTo>
-                  <a:lnTo>
-                    <a:pt x="2016229" y="0"/>
+            <p:cNvPr id="145" name="pl145"/>
+            <p:cNvSpPr/>
+            <p:nvPr/>
+          </p:nvSpPr>
+          <p:spPr>
+            <a:xfrm>
+              <a:off x="5549263" y="4927980"/>
+              <a:ext cx="4302229" cy="0"/>
+            </a:xfrm>
+            <a:custGeom>
+              <a:avLst/>
+              <a:pathLst>
+                <a:path w="4302229" h="0">
+                  <a:moveTo>
+                    <a:pt x="0" y="0"/>
+                  </a:moveTo>
+                  <a:lnTo>
+                    <a:pt x="4302229" y="0"/>
+                  </a:lnTo>
+                  <a:lnTo>
+                    <a:pt x="4302229" y="0"/>
                   </a:lnTo>
                 </a:path>
               </a:pathLst>
@@ -8641,27 +8899,27 @@
         </p:sp>
         <p:sp>
           <p:nvSpPr>
-            <p:cNvPr id="140" name="pl140"/>
-            <p:cNvSpPr/>
-            <p:nvPr/>
-          </p:nvSpPr>
-          <p:spPr>
-            <a:xfrm>
-              <a:off x="7835263" y="2058601"/>
-              <a:ext cx="2016229" cy="0"/>
-            </a:xfrm>
-            <a:custGeom>
-              <a:avLst/>
-              <a:pathLst>
-                <a:path w="2016229" h="0">
-                  <a:moveTo>
-                    <a:pt x="0" y="0"/>
-                  </a:moveTo>
-                  <a:lnTo>
-                    <a:pt x="2016229" y="0"/>
-                  </a:lnTo>
-                  <a:lnTo>
-                    <a:pt x="2016229" y="0"/>
+            <p:cNvPr id="146" name="pl146"/>
+            <p:cNvSpPr/>
+            <p:nvPr/>
+          </p:nvSpPr>
+          <p:spPr>
+            <a:xfrm>
+              <a:off x="5549263" y="4340860"/>
+              <a:ext cx="4302229" cy="0"/>
+            </a:xfrm>
+            <a:custGeom>
+              <a:avLst/>
+              <a:pathLst>
+                <a:path w="4302229" h="0">
+                  <a:moveTo>
+                    <a:pt x="0" y="0"/>
+                  </a:moveTo>
+                  <a:lnTo>
+                    <a:pt x="4302229" y="0"/>
+                  </a:lnTo>
+                  <a:lnTo>
+                    <a:pt x="4302229" y="0"/>
                   </a:lnTo>
                 </a:path>
               </a:pathLst>
@@ -8684,21 +8942,21 @@
         </p:sp>
         <p:sp>
           <p:nvSpPr>
-            <p:cNvPr id="141" name="pl141"/>
-            <p:cNvSpPr/>
-            <p:nvPr/>
-          </p:nvSpPr>
-          <p:spPr>
-            <a:xfrm>
-              <a:off x="8005996" y="1434040"/>
-              <a:ext cx="0" cy="4580111"/>
-            </a:xfrm>
-            <a:custGeom>
-              <a:avLst/>
-              <a:pathLst>
-                <a:path w="0" h="4580111">
-                  <a:moveTo>
-                    <a:pt x="0" y="4580111"/>
+            <p:cNvPr id="147" name="pl147"/>
+            <p:cNvSpPr/>
+            <p:nvPr/>
+          </p:nvSpPr>
+          <p:spPr>
+            <a:xfrm>
+              <a:off x="5913573" y="4076656"/>
+              <a:ext cx="0" cy="1937495"/>
+            </a:xfrm>
+            <a:custGeom>
+              <a:avLst/>
+              <a:pathLst>
+                <a:path w="0" h="1937495">
+                  <a:moveTo>
+                    <a:pt x="0" y="1937495"/>
                   </a:moveTo>
                   <a:lnTo>
                     <a:pt x="0" y="0"/>
@@ -8727,21 +8985,21 @@
         </p:sp>
         <p:sp>
           <p:nvSpPr>
-            <p:cNvPr id="142" name="pl142"/>
-            <p:cNvSpPr/>
-            <p:nvPr/>
-          </p:nvSpPr>
-          <p:spPr>
-            <a:xfrm>
-              <a:off x="8471208" y="1434040"/>
-              <a:ext cx="0" cy="4580111"/>
-            </a:xfrm>
-            <a:custGeom>
-              <a:avLst/>
-              <a:pathLst>
-                <a:path w="0" h="4580111">
-                  <a:moveTo>
-                    <a:pt x="0" y="4580111"/>
+            <p:cNvPr id="148" name="pl148"/>
+            <p:cNvSpPr/>
+            <p:nvPr/>
+          </p:nvSpPr>
+          <p:spPr>
+            <a:xfrm>
+              <a:off x="6906242" y="4076656"/>
+              <a:ext cx="0" cy="1937495"/>
+            </a:xfrm>
+            <a:custGeom>
+              <a:avLst/>
+              <a:pathLst>
+                <a:path w="0" h="1937495">
+                  <a:moveTo>
+                    <a:pt x="0" y="1937495"/>
                   </a:moveTo>
                   <a:lnTo>
                     <a:pt x="0" y="0"/>
@@ -8770,21 +9028,21 @@
         </p:sp>
         <p:sp>
           <p:nvSpPr>
-            <p:cNvPr id="143" name="pl143"/>
-            <p:cNvSpPr/>
-            <p:nvPr/>
-          </p:nvSpPr>
-          <p:spPr>
-            <a:xfrm>
-              <a:off x="8936420" y="1434040"/>
-              <a:ext cx="0" cy="4580111"/>
-            </a:xfrm>
-            <a:custGeom>
-              <a:avLst/>
-              <a:pathLst>
-                <a:path w="0" h="4580111">
-                  <a:moveTo>
-                    <a:pt x="0" y="4580111"/>
+            <p:cNvPr id="149" name="pl149"/>
+            <p:cNvSpPr/>
+            <p:nvPr/>
+          </p:nvSpPr>
+          <p:spPr>
+            <a:xfrm>
+              <a:off x="7898911" y="4076656"/>
+              <a:ext cx="0" cy="1937495"/>
+            </a:xfrm>
+            <a:custGeom>
+              <a:avLst/>
+              <a:pathLst>
+                <a:path w="0" h="1937495">
+                  <a:moveTo>
+                    <a:pt x="0" y="1937495"/>
                   </a:moveTo>
                   <a:lnTo>
                     <a:pt x="0" y="0"/>
@@ -8813,21 +9071,21 @@
         </p:sp>
         <p:sp>
           <p:nvSpPr>
-            <p:cNvPr id="144" name="pl144"/>
-            <p:cNvSpPr/>
-            <p:nvPr/>
-          </p:nvSpPr>
-          <p:spPr>
-            <a:xfrm>
-              <a:off x="9401632" y="1434040"/>
-              <a:ext cx="0" cy="4580111"/>
-            </a:xfrm>
-            <a:custGeom>
-              <a:avLst/>
-              <a:pathLst>
-                <a:path w="0" h="4580111">
-                  <a:moveTo>
-                    <a:pt x="0" y="4580111"/>
+            <p:cNvPr id="150" name="pl150"/>
+            <p:cNvSpPr/>
+            <p:nvPr/>
+          </p:nvSpPr>
+          <p:spPr>
+            <a:xfrm>
+              <a:off x="8891581" y="4076656"/>
+              <a:ext cx="0" cy="1937495"/>
+            </a:xfrm>
+            <a:custGeom>
+              <a:avLst/>
+              <a:pathLst>
+                <a:path w="0" h="1937495">
+                  <a:moveTo>
+                    <a:pt x="0" y="1937495"/>
                   </a:moveTo>
                   <a:lnTo>
                     <a:pt x="0" y="0"/>
@@ -8856,27 +9114,27 @@
         </p:sp>
         <p:sp>
           <p:nvSpPr>
-            <p:cNvPr id="145" name="pl145"/>
-            <p:cNvSpPr/>
-            <p:nvPr/>
-          </p:nvSpPr>
-          <p:spPr>
-            <a:xfrm>
-              <a:off x="7835263" y="5528382"/>
-              <a:ext cx="2016229" cy="0"/>
-            </a:xfrm>
-            <a:custGeom>
-              <a:avLst/>
-              <a:pathLst>
-                <a:path w="2016229" h="0">
-                  <a:moveTo>
-                    <a:pt x="0" y="0"/>
-                  </a:moveTo>
-                  <a:lnTo>
-                    <a:pt x="2016229" y="0"/>
-                  </a:lnTo>
-                  <a:lnTo>
-                    <a:pt x="2016229" y="0"/>
+            <p:cNvPr id="151" name="pl151"/>
+            <p:cNvSpPr/>
+            <p:nvPr/>
+          </p:nvSpPr>
+          <p:spPr>
+            <a:xfrm>
+              <a:off x="5549263" y="5808660"/>
+              <a:ext cx="4302229" cy="0"/>
+            </a:xfrm>
+            <a:custGeom>
+              <a:avLst/>
+              <a:pathLst>
+                <a:path w="4302229" h="0">
+                  <a:moveTo>
+                    <a:pt x="0" y="0"/>
+                  </a:moveTo>
+                  <a:lnTo>
+                    <a:pt x="4302229" y="0"/>
+                  </a:lnTo>
+                  <a:lnTo>
+                    <a:pt x="4302229" y="0"/>
                   </a:lnTo>
                 </a:path>
               </a:pathLst>
@@ -8899,27 +9157,27 @@
         </p:sp>
         <p:sp>
           <p:nvSpPr>
-            <p:cNvPr id="146" name="pl146"/>
-            <p:cNvSpPr/>
-            <p:nvPr/>
-          </p:nvSpPr>
-          <p:spPr>
-            <a:xfrm>
-              <a:off x="7835263" y="4140470"/>
-              <a:ext cx="2016229" cy="0"/>
-            </a:xfrm>
-            <a:custGeom>
-              <a:avLst/>
-              <a:pathLst>
-                <a:path w="2016229" h="0">
-                  <a:moveTo>
-                    <a:pt x="0" y="0"/>
-                  </a:moveTo>
-                  <a:lnTo>
-                    <a:pt x="2016229" y="0"/>
-                  </a:lnTo>
-                  <a:lnTo>
-                    <a:pt x="2016229" y="0"/>
+            <p:cNvPr id="152" name="pl152"/>
+            <p:cNvSpPr/>
+            <p:nvPr/>
+          </p:nvSpPr>
+          <p:spPr>
+            <a:xfrm>
+              <a:off x="5549263" y="5221540"/>
+              <a:ext cx="4302229" cy="0"/>
+            </a:xfrm>
+            <a:custGeom>
+              <a:avLst/>
+              <a:pathLst>
+                <a:path w="4302229" h="0">
+                  <a:moveTo>
+                    <a:pt x="0" y="0"/>
+                  </a:moveTo>
+                  <a:lnTo>
+                    <a:pt x="4302229" y="0"/>
+                  </a:lnTo>
+                  <a:lnTo>
+                    <a:pt x="4302229" y="0"/>
                   </a:lnTo>
                 </a:path>
               </a:pathLst>
@@ -8942,27 +9200,27 @@
         </p:sp>
         <p:sp>
           <p:nvSpPr>
-            <p:cNvPr id="147" name="pl147"/>
-            <p:cNvSpPr/>
-            <p:nvPr/>
-          </p:nvSpPr>
-          <p:spPr>
-            <a:xfrm>
-              <a:off x="7835263" y="2752557"/>
-              <a:ext cx="2016229" cy="0"/>
-            </a:xfrm>
-            <a:custGeom>
-              <a:avLst/>
-              <a:pathLst>
-                <a:path w="2016229" h="0">
-                  <a:moveTo>
-                    <a:pt x="0" y="0"/>
-                  </a:moveTo>
-                  <a:lnTo>
-                    <a:pt x="2016229" y="0"/>
-                  </a:lnTo>
-                  <a:lnTo>
-                    <a:pt x="2016229" y="0"/>
+            <p:cNvPr id="153" name="pl153"/>
+            <p:cNvSpPr/>
+            <p:nvPr/>
+          </p:nvSpPr>
+          <p:spPr>
+            <a:xfrm>
+              <a:off x="5549263" y="4634420"/>
+              <a:ext cx="4302229" cy="0"/>
+            </a:xfrm>
+            <a:custGeom>
+              <a:avLst/>
+              <a:pathLst>
+                <a:path w="4302229" h="0">
+                  <a:moveTo>
+                    <a:pt x="0" y="0"/>
+                  </a:moveTo>
+                  <a:lnTo>
+                    <a:pt x="4302229" y="0"/>
+                  </a:lnTo>
+                  <a:lnTo>
+                    <a:pt x="4302229" y="0"/>
                   </a:lnTo>
                 </a:path>
               </a:pathLst>
@@ -8985,21 +9243,21 @@
         </p:sp>
         <p:sp>
           <p:nvSpPr>
-            <p:cNvPr id="148" name="pl148"/>
-            <p:cNvSpPr/>
-            <p:nvPr/>
-          </p:nvSpPr>
-          <p:spPr>
-            <a:xfrm>
-              <a:off x="8238602" y="1434040"/>
-              <a:ext cx="0" cy="4580111"/>
-            </a:xfrm>
-            <a:custGeom>
-              <a:avLst/>
-              <a:pathLst>
-                <a:path w="0" h="4580111">
-                  <a:moveTo>
-                    <a:pt x="0" y="4580111"/>
+            <p:cNvPr id="154" name="pl154"/>
+            <p:cNvSpPr/>
+            <p:nvPr/>
+          </p:nvSpPr>
+          <p:spPr>
+            <a:xfrm>
+              <a:off x="6409907" y="4076656"/>
+              <a:ext cx="0" cy="1937495"/>
+            </a:xfrm>
+            <a:custGeom>
+              <a:avLst/>
+              <a:pathLst>
+                <a:path w="0" h="1937495">
+                  <a:moveTo>
+                    <a:pt x="0" y="1937495"/>
                   </a:moveTo>
                   <a:lnTo>
                     <a:pt x="0" y="0"/>
@@ -9028,21 +9286,21 @@
         </p:sp>
         <p:sp>
           <p:nvSpPr>
-            <p:cNvPr id="149" name="pl149"/>
-            <p:cNvSpPr/>
-            <p:nvPr/>
-          </p:nvSpPr>
-          <p:spPr>
-            <a:xfrm>
-              <a:off x="8703814" y="1434040"/>
-              <a:ext cx="0" cy="4580111"/>
-            </a:xfrm>
-            <a:custGeom>
-              <a:avLst/>
-              <a:pathLst>
-                <a:path w="0" h="4580111">
-                  <a:moveTo>
-                    <a:pt x="0" y="4580111"/>
+            <p:cNvPr id="155" name="pl155"/>
+            <p:cNvSpPr/>
+            <p:nvPr/>
+          </p:nvSpPr>
+          <p:spPr>
+            <a:xfrm>
+              <a:off x="7402577" y="4076656"/>
+              <a:ext cx="0" cy="1937495"/>
+            </a:xfrm>
+            <a:custGeom>
+              <a:avLst/>
+              <a:pathLst>
+                <a:path w="0" h="1937495">
+                  <a:moveTo>
+                    <a:pt x="0" y="1937495"/>
                   </a:moveTo>
                   <a:lnTo>
                     <a:pt x="0" y="0"/>
@@ -9071,21 +9329,21 @@
         </p:sp>
         <p:sp>
           <p:nvSpPr>
-            <p:cNvPr id="150" name="pl150"/>
-            <p:cNvSpPr/>
-            <p:nvPr/>
-          </p:nvSpPr>
-          <p:spPr>
-            <a:xfrm>
-              <a:off x="9169026" y="1434040"/>
-              <a:ext cx="0" cy="4580111"/>
-            </a:xfrm>
-            <a:custGeom>
-              <a:avLst/>
-              <a:pathLst>
-                <a:path w="0" h="4580111">
-                  <a:moveTo>
-                    <a:pt x="0" y="4580111"/>
+            <p:cNvPr id="156" name="pl156"/>
+            <p:cNvSpPr/>
+            <p:nvPr/>
+          </p:nvSpPr>
+          <p:spPr>
+            <a:xfrm>
+              <a:off x="8395246" y="4076656"/>
+              <a:ext cx="0" cy="1937495"/>
+            </a:xfrm>
+            <a:custGeom>
+              <a:avLst/>
+              <a:pathLst>
+                <a:path w="0" h="1937495">
+                  <a:moveTo>
+                    <a:pt x="0" y="1937495"/>
                   </a:moveTo>
                   <a:lnTo>
                     <a:pt x="0" y="0"/>
@@ -9114,21 +9372,21 @@
         </p:sp>
         <p:sp>
           <p:nvSpPr>
-            <p:cNvPr id="151" name="pl151"/>
-            <p:cNvSpPr/>
-            <p:nvPr/>
-          </p:nvSpPr>
-          <p:spPr>
-            <a:xfrm>
-              <a:off x="9634238" y="1434040"/>
-              <a:ext cx="0" cy="4580111"/>
-            </a:xfrm>
-            <a:custGeom>
-              <a:avLst/>
-              <a:pathLst>
-                <a:path w="0" h="4580111">
-                  <a:moveTo>
-                    <a:pt x="0" y="4580111"/>
+            <p:cNvPr id="157" name="pl157"/>
+            <p:cNvSpPr/>
+            <p:nvPr/>
+          </p:nvSpPr>
+          <p:spPr>
+            <a:xfrm>
+              <a:off x="9387915" y="4076656"/>
+              <a:ext cx="0" cy="1937495"/>
+            </a:xfrm>
+            <a:custGeom>
+              <a:avLst/>
+              <a:pathLst>
+                <a:path w="0" h="1937495">
+                  <a:moveTo>
+                    <a:pt x="0" y="1937495"/>
                   </a:moveTo>
                   <a:lnTo>
                     <a:pt x="0" y="0"/>
@@ -9157,13 +9415,13 @@
         </p:sp>
         <p:sp>
           <p:nvSpPr>
-            <p:cNvPr id="152" name="pt152"/>
-            <p:cNvSpPr/>
-            <p:nvPr/>
-          </p:nvSpPr>
-          <p:spPr>
-            <a:xfrm>
-              <a:off x="8027691" y="3756253"/>
+            <p:cNvPr id="158" name="pt158"/>
+            <p:cNvSpPr/>
+            <p:nvPr/>
+          </p:nvSpPr>
+          <p:spPr>
+            <a:xfrm>
+              <a:off x="5988014" y="5044683"/>
               <a:ext cx="49651" cy="49651"/>
             </a:xfrm>
             <a:prstGeom prst="ellipse">
@@ -9192,13 +9450,13 @@
         </p:sp>
         <p:sp>
           <p:nvSpPr>
-            <p:cNvPr id="153" name="pt153"/>
-            <p:cNvSpPr/>
-            <p:nvPr/>
-          </p:nvSpPr>
-          <p:spPr>
-            <a:xfrm>
-              <a:off x="8399861" y="3748885"/>
+            <p:cNvPr id="159" name="pt159"/>
+            <p:cNvSpPr/>
+            <p:nvPr/>
+          </p:nvSpPr>
+          <p:spPr>
+            <a:xfrm>
+              <a:off x="6782149" y="5041566"/>
               <a:ext cx="49651" cy="49651"/>
             </a:xfrm>
             <a:prstGeom prst="ellipse">
@@ -9227,13 +9485,13 @@
         </p:sp>
         <p:sp>
           <p:nvSpPr>
-            <p:cNvPr id="154" name="pt154"/>
-            <p:cNvSpPr/>
-            <p:nvPr/>
-          </p:nvSpPr>
-          <p:spPr>
-            <a:xfrm>
-              <a:off x="8678988" y="3748192"/>
+            <p:cNvPr id="160" name="pt160"/>
+            <p:cNvSpPr/>
+            <p:nvPr/>
+          </p:nvSpPr>
+          <p:spPr>
+            <a:xfrm>
+              <a:off x="7377751" y="5041273"/>
               <a:ext cx="49651" cy="49651"/>
             </a:xfrm>
             <a:prstGeom prst="ellipse">
@@ -9262,13 +9520,13 @@
         </p:sp>
         <p:sp>
           <p:nvSpPr>
-            <p:cNvPr id="155" name="pt155"/>
-            <p:cNvSpPr/>
-            <p:nvPr/>
-          </p:nvSpPr>
-          <p:spPr>
-            <a:xfrm>
-              <a:off x="9144200" y="3740335"/>
+            <p:cNvPr id="161" name="pt161"/>
+            <p:cNvSpPr/>
+            <p:nvPr/>
+          </p:nvSpPr>
+          <p:spPr>
+            <a:xfrm>
+              <a:off x="8370420" y="5037949"/>
               <a:ext cx="49651" cy="49651"/>
             </a:xfrm>
             <a:prstGeom prst="ellipse">
@@ -9297,13 +9555,13 @@
         </p:sp>
         <p:sp>
           <p:nvSpPr>
-            <p:cNvPr id="156" name="pt156"/>
-            <p:cNvSpPr/>
-            <p:nvPr/>
-          </p:nvSpPr>
-          <p:spPr>
-            <a:xfrm>
-              <a:off x="9609412" y="3724186"/>
+            <p:cNvPr id="162" name="pt162"/>
+            <p:cNvSpPr/>
+            <p:nvPr/>
+          </p:nvSpPr>
+          <p:spPr>
+            <a:xfrm>
+              <a:off x="9363089" y="5031118"/>
               <a:ext cx="49651" cy="49651"/>
             </a:xfrm>
             <a:prstGeom prst="ellipse">
@@ -9332,24 +9590,24 @@
         </p:sp>
         <p:sp>
           <p:nvSpPr>
-            <p:cNvPr id="157" name="pl157"/>
-            <p:cNvSpPr/>
-            <p:nvPr/>
-          </p:nvSpPr>
-          <p:spPr>
-            <a:xfrm>
-              <a:off x="7926910" y="1778067"/>
-              <a:ext cx="251214" cy="0"/>
-            </a:xfrm>
-            <a:custGeom>
-              <a:avLst/>
-              <a:pathLst>
-                <a:path w="251214" h="0">
-                  <a:moveTo>
-                    <a:pt x="0" y="0"/>
-                  </a:moveTo>
-                  <a:lnTo>
-                    <a:pt x="251214" y="0"/>
+            <p:cNvPr id="163" name="pl163"/>
+            <p:cNvSpPr/>
+            <p:nvPr/>
+          </p:nvSpPr>
+          <p:spPr>
+            <a:xfrm>
+              <a:off x="5744819" y="4222188"/>
+              <a:ext cx="536041" cy="0"/>
+            </a:xfrm>
+            <a:custGeom>
+              <a:avLst/>
+              <a:pathLst>
+                <a:path w="536041" h="0">
+                  <a:moveTo>
+                    <a:pt x="0" y="0"/>
+                  </a:moveTo>
+                  <a:lnTo>
+                    <a:pt x="536041" y="0"/>
                   </a:lnTo>
                 </a:path>
               </a:pathLst>
@@ -9372,24 +9630,24 @@
         </p:sp>
         <p:sp>
           <p:nvSpPr>
-            <p:cNvPr id="158" name="pl158"/>
-            <p:cNvSpPr/>
-            <p:nvPr/>
-          </p:nvSpPr>
-          <p:spPr>
-            <a:xfrm>
-              <a:off x="8052517" y="1778067"/>
-              <a:ext cx="0" cy="3746829"/>
-            </a:xfrm>
-            <a:custGeom>
-              <a:avLst/>
-              <a:pathLst>
-                <a:path w="0" h="3746829">
-                  <a:moveTo>
-                    <a:pt x="0" y="0"/>
-                  </a:moveTo>
-                  <a:lnTo>
-                    <a:pt x="0" y="3746829"/>
+            <p:cNvPr id="164" name="pl164"/>
+            <p:cNvSpPr/>
+            <p:nvPr/>
+          </p:nvSpPr>
+          <p:spPr>
+            <a:xfrm>
+              <a:off x="6012839" y="4222188"/>
+              <a:ext cx="0" cy="1584997"/>
+            </a:xfrm>
+            <a:custGeom>
+              <a:avLst/>
+              <a:pathLst>
+                <a:path w="0" h="1584997">
+                  <a:moveTo>
+                    <a:pt x="0" y="0"/>
+                  </a:moveTo>
+                  <a:lnTo>
+                    <a:pt x="0" y="1584997"/>
                   </a:lnTo>
                 </a:path>
               </a:pathLst>
@@ -9412,24 +9670,24 @@
         </p:sp>
         <p:sp>
           <p:nvSpPr>
-            <p:cNvPr id="159" name="pl159"/>
-            <p:cNvSpPr/>
-            <p:nvPr/>
-          </p:nvSpPr>
-          <p:spPr>
-            <a:xfrm>
-              <a:off x="7926910" y="5524897"/>
-              <a:ext cx="251214" cy="0"/>
-            </a:xfrm>
-            <a:custGeom>
-              <a:avLst/>
-              <a:pathLst>
-                <a:path w="251214" h="0">
-                  <a:moveTo>
-                    <a:pt x="0" y="0"/>
-                  </a:moveTo>
-                  <a:lnTo>
-                    <a:pt x="251214" y="0"/>
+            <p:cNvPr id="165" name="pl165"/>
+            <p:cNvSpPr/>
+            <p:nvPr/>
+          </p:nvSpPr>
+          <p:spPr>
+            <a:xfrm>
+              <a:off x="5744819" y="5807185"/>
+              <a:ext cx="536041" cy="0"/>
+            </a:xfrm>
+            <a:custGeom>
+              <a:avLst/>
+              <a:pathLst>
+                <a:path w="536041" h="0">
+                  <a:moveTo>
+                    <a:pt x="0" y="0"/>
+                  </a:moveTo>
+                  <a:lnTo>
+                    <a:pt x="536041" y="0"/>
                   </a:lnTo>
                 </a:path>
               </a:pathLst>
@@ -9452,24 +9710,24 @@
         </p:sp>
         <p:sp>
           <p:nvSpPr>
-            <p:cNvPr id="160" name="pl160"/>
-            <p:cNvSpPr/>
-            <p:nvPr/>
-          </p:nvSpPr>
-          <p:spPr>
-            <a:xfrm>
-              <a:off x="8299079" y="2718980"/>
-              <a:ext cx="251214" cy="0"/>
-            </a:xfrm>
-            <a:custGeom>
-              <a:avLst/>
-              <a:pathLst>
-                <a:path w="251214" h="0">
-                  <a:moveTo>
-                    <a:pt x="0" y="0"/>
-                  </a:moveTo>
-                  <a:lnTo>
-                    <a:pt x="251214" y="0"/>
+            <p:cNvPr id="166" name="pl166"/>
+            <p:cNvSpPr/>
+            <p:nvPr/>
+          </p:nvSpPr>
+          <p:spPr>
+            <a:xfrm>
+              <a:off x="6538954" y="4620216"/>
+              <a:ext cx="536041" cy="0"/>
+            </a:xfrm>
+            <a:custGeom>
+              <a:avLst/>
+              <a:pathLst>
+                <a:path w="536041" h="0">
+                  <a:moveTo>
+                    <a:pt x="0" y="0"/>
+                  </a:moveTo>
+                  <a:lnTo>
+                    <a:pt x="536041" y="0"/>
                   </a:lnTo>
                 </a:path>
               </a:pathLst>
@@ -9492,24 +9750,24 @@
         </p:sp>
         <p:sp>
           <p:nvSpPr>
-            <p:cNvPr id="161" name="pl161"/>
-            <p:cNvSpPr/>
-            <p:nvPr/>
-          </p:nvSpPr>
-          <p:spPr>
-            <a:xfrm>
-              <a:off x="8424687" y="2718980"/>
-              <a:ext cx="0" cy="1946367"/>
-            </a:xfrm>
-            <a:custGeom>
-              <a:avLst/>
-              <a:pathLst>
-                <a:path w="0" h="1946367">
-                  <a:moveTo>
-                    <a:pt x="0" y="0"/>
-                  </a:moveTo>
-                  <a:lnTo>
-                    <a:pt x="0" y="1946367"/>
+            <p:cNvPr id="167" name="pl167"/>
+            <p:cNvSpPr/>
+            <p:nvPr/>
+          </p:nvSpPr>
+          <p:spPr>
+            <a:xfrm>
+              <a:off x="6806975" y="4620216"/>
+              <a:ext cx="0" cy="823359"/>
+            </a:xfrm>
+            <a:custGeom>
+              <a:avLst/>
+              <a:pathLst>
+                <a:path w="0" h="823359">
+                  <a:moveTo>
+                    <a:pt x="0" y="0"/>
+                  </a:moveTo>
+                  <a:lnTo>
+                    <a:pt x="0" y="823359"/>
                   </a:lnTo>
                 </a:path>
               </a:pathLst>
@@ -9532,24 +9790,24 @@
         </p:sp>
         <p:sp>
           <p:nvSpPr>
-            <p:cNvPr id="162" name="pl162"/>
-            <p:cNvSpPr/>
-            <p:nvPr/>
-          </p:nvSpPr>
-          <p:spPr>
-            <a:xfrm>
-              <a:off x="8299079" y="4665347"/>
-              <a:ext cx="251214" cy="0"/>
-            </a:xfrm>
-            <a:custGeom>
-              <a:avLst/>
-              <a:pathLst>
-                <a:path w="251214" h="0">
-                  <a:moveTo>
-                    <a:pt x="0" y="0"/>
-                  </a:moveTo>
-                  <a:lnTo>
-                    <a:pt x="251214" y="0"/>
+            <p:cNvPr id="168" name="pl168"/>
+            <p:cNvSpPr/>
+            <p:nvPr/>
+          </p:nvSpPr>
+          <p:spPr>
+            <a:xfrm>
+              <a:off x="6538954" y="5443575"/>
+              <a:ext cx="536041" cy="0"/>
+            </a:xfrm>
+            <a:custGeom>
+              <a:avLst/>
+              <a:pathLst>
+                <a:path w="536041" h="0">
+                  <a:moveTo>
+                    <a:pt x="0" y="0"/>
+                  </a:moveTo>
+                  <a:lnTo>
+                    <a:pt x="536041" y="0"/>
                   </a:lnTo>
                 </a:path>
               </a:pathLst>
@@ -9572,24 +9830,24 @@
         </p:sp>
         <p:sp>
           <p:nvSpPr>
-            <p:cNvPr id="163" name="pl163"/>
-            <p:cNvSpPr/>
-            <p:nvPr/>
-          </p:nvSpPr>
-          <p:spPr>
-            <a:xfrm>
-              <a:off x="8578207" y="2776049"/>
-              <a:ext cx="251214" cy="0"/>
-            </a:xfrm>
-            <a:custGeom>
-              <a:avLst/>
-              <a:pathLst>
-                <a:path w="251214" h="0">
-                  <a:moveTo>
-                    <a:pt x="0" y="0"/>
-                  </a:moveTo>
-                  <a:lnTo>
-                    <a:pt x="251214" y="0"/>
+            <p:cNvPr id="169" name="pl169"/>
+            <p:cNvSpPr/>
+            <p:nvPr/>
+          </p:nvSpPr>
+          <p:spPr>
+            <a:xfrm>
+              <a:off x="7134556" y="4644358"/>
+              <a:ext cx="536041" cy="0"/>
+            </a:xfrm>
+            <a:custGeom>
+              <a:avLst/>
+              <a:pathLst>
+                <a:path w="536041" h="0">
+                  <a:moveTo>
+                    <a:pt x="0" y="0"/>
+                  </a:moveTo>
+                  <a:lnTo>
+                    <a:pt x="536041" y="0"/>
                   </a:lnTo>
                 </a:path>
               </a:pathLst>
@@ -9612,24 +9870,24 @@
         </p:sp>
         <p:sp>
           <p:nvSpPr>
-            <p:cNvPr id="164" name="pl164"/>
-            <p:cNvSpPr/>
-            <p:nvPr/>
-          </p:nvSpPr>
-          <p:spPr>
-            <a:xfrm>
-              <a:off x="8703814" y="2776049"/>
-              <a:ext cx="0" cy="1811296"/>
-            </a:xfrm>
-            <a:custGeom>
-              <a:avLst/>
-              <a:pathLst>
-                <a:path w="0" h="1811296">
-                  <a:moveTo>
-                    <a:pt x="0" y="0"/>
-                  </a:moveTo>
-                  <a:lnTo>
-                    <a:pt x="0" y="1811296"/>
+            <p:cNvPr id="170" name="pl170"/>
+            <p:cNvSpPr/>
+            <p:nvPr/>
+          </p:nvSpPr>
+          <p:spPr>
+            <a:xfrm>
+              <a:off x="7402577" y="4644358"/>
+              <a:ext cx="0" cy="766221"/>
+            </a:xfrm>
+            <a:custGeom>
+              <a:avLst/>
+              <a:pathLst>
+                <a:path w="0" h="766221">
+                  <a:moveTo>
+                    <a:pt x="0" y="0"/>
+                  </a:moveTo>
+                  <a:lnTo>
+                    <a:pt x="0" y="766221"/>
                   </a:lnTo>
                 </a:path>
               </a:pathLst>
@@ -9652,24 +9910,24 @@
         </p:sp>
         <p:sp>
           <p:nvSpPr>
-            <p:cNvPr id="165" name="pl165"/>
-            <p:cNvSpPr/>
-            <p:nvPr/>
-          </p:nvSpPr>
-          <p:spPr>
-            <a:xfrm>
-              <a:off x="8578207" y="4587345"/>
-              <a:ext cx="251214" cy="0"/>
-            </a:xfrm>
-            <a:custGeom>
-              <a:avLst/>
-              <a:pathLst>
-                <a:path w="251214" h="0">
-                  <a:moveTo>
-                    <a:pt x="0" y="0"/>
-                  </a:moveTo>
-                  <a:lnTo>
-                    <a:pt x="251214" y="0"/>
+            <p:cNvPr id="171" name="pl171"/>
+            <p:cNvSpPr/>
+            <p:nvPr/>
+          </p:nvSpPr>
+          <p:spPr>
+            <a:xfrm>
+              <a:off x="7134556" y="5410579"/>
+              <a:ext cx="536041" cy="0"/>
+            </a:xfrm>
+            <a:custGeom>
+              <a:avLst/>
+              <a:pathLst>
+                <a:path w="536041" h="0">
+                  <a:moveTo>
+                    <a:pt x="0" y="0"/>
+                  </a:moveTo>
+                  <a:lnTo>
+                    <a:pt x="536041" y="0"/>
                   </a:lnTo>
                 </a:path>
               </a:pathLst>
@@ -9692,27 +9950,27 @@
         </p:sp>
         <p:sp>
           <p:nvSpPr>
-            <p:cNvPr id="166" name="pl166"/>
-            <p:cNvSpPr/>
-            <p:nvPr/>
-          </p:nvSpPr>
-          <p:spPr>
-            <a:xfrm>
-              <a:off x="7835263" y="3585305"/>
-              <a:ext cx="2016229" cy="0"/>
-            </a:xfrm>
-            <a:custGeom>
-              <a:avLst/>
-              <a:pathLst>
-                <a:path w="2016229" h="0">
-                  <a:moveTo>
-                    <a:pt x="0" y="0"/>
-                  </a:moveTo>
-                  <a:lnTo>
-                    <a:pt x="2016229" y="0"/>
-                  </a:lnTo>
-                  <a:lnTo>
-                    <a:pt x="2016229" y="0"/>
+            <p:cNvPr id="172" name="pl172"/>
+            <p:cNvSpPr/>
+            <p:nvPr/>
+          </p:nvSpPr>
+          <p:spPr>
+            <a:xfrm>
+              <a:off x="5549263" y="4974949"/>
+              <a:ext cx="4302229" cy="0"/>
+            </a:xfrm>
+            <a:custGeom>
+              <a:avLst/>
+              <a:pathLst>
+                <a:path w="4302229" h="0">
+                  <a:moveTo>
+                    <a:pt x="0" y="0"/>
+                  </a:moveTo>
+                  <a:lnTo>
+                    <a:pt x="4302229" y="0"/>
+                  </a:lnTo>
+                  <a:lnTo>
+                    <a:pt x="4302229" y="0"/>
                   </a:lnTo>
                 </a:path>
               </a:pathLst>
@@ -9735,14 +9993,100 @@
         </p:sp>
         <p:sp>
           <p:nvSpPr>
-            <p:cNvPr id="167" name="rc167"/>
-            <p:cNvSpPr/>
-            <p:nvPr/>
-          </p:nvSpPr>
-          <p:spPr>
-            <a:xfrm>
-              <a:off x="7835263" y="1434040"/>
-              <a:ext cx="2016229" cy="4580111"/>
+            <p:cNvPr id="173" name="pl173"/>
+            <p:cNvSpPr/>
+            <p:nvPr/>
+          </p:nvSpPr>
+          <p:spPr>
+            <a:xfrm>
+              <a:off x="5549263" y="4728359"/>
+              <a:ext cx="4302229" cy="0"/>
+            </a:xfrm>
+            <a:custGeom>
+              <a:avLst/>
+              <a:pathLst>
+                <a:path w="4302229" h="0">
+                  <a:moveTo>
+                    <a:pt x="0" y="0"/>
+                  </a:moveTo>
+                  <a:lnTo>
+                    <a:pt x="4302229" y="0"/>
+                  </a:lnTo>
+                  <a:lnTo>
+                    <a:pt x="4302229" y="0"/>
+                  </a:lnTo>
+                </a:path>
+              </a:pathLst>
+            </a:custGeom>
+            <a:ln w="13550" cap="flat">
+              <a:solidFill>
+                <a:srgbClr val="B3B3B3">
+                  <a:alpha val="100000"/>
+                </a:srgbClr>
+              </a:solidFill>
+              <a:prstDash val="dash"/>
+              <a:round/>
+            </a:ln>
+          </p:spPr>
+          <p:txBody>
+            <a:bodyPr/>
+            <a:lstStyle/>
+            <a:p/>
+          </p:txBody>
+        </p:sp>
+        <p:sp>
+          <p:nvSpPr>
+            <p:cNvPr id="174" name="pl174"/>
+            <p:cNvSpPr/>
+            <p:nvPr/>
+          </p:nvSpPr>
+          <p:spPr>
+            <a:xfrm>
+              <a:off x="5549263" y="5221540"/>
+              <a:ext cx="4302229" cy="0"/>
+            </a:xfrm>
+            <a:custGeom>
+              <a:avLst/>
+              <a:pathLst>
+                <a:path w="4302229" h="0">
+                  <a:moveTo>
+                    <a:pt x="0" y="0"/>
+                  </a:moveTo>
+                  <a:lnTo>
+                    <a:pt x="4302229" y="0"/>
+                  </a:lnTo>
+                  <a:lnTo>
+                    <a:pt x="4302229" y="0"/>
+                  </a:lnTo>
+                </a:path>
+              </a:pathLst>
+            </a:custGeom>
+            <a:ln w="13550" cap="flat">
+              <a:solidFill>
+                <a:srgbClr val="B3B3B3">
+                  <a:alpha val="100000"/>
+                </a:srgbClr>
+              </a:solidFill>
+              <a:prstDash val="dash"/>
+              <a:round/>
+            </a:ln>
+          </p:spPr>
+          <p:txBody>
+            <a:bodyPr/>
+            <a:lstStyle/>
+            <a:p/>
+          </p:txBody>
+        </p:sp>
+        <p:sp>
+          <p:nvSpPr>
+            <p:cNvPr id="175" name="rc175"/>
+            <p:cNvSpPr/>
+            <p:nvPr/>
+          </p:nvSpPr>
+          <p:spPr>
+            <a:xfrm>
+              <a:off x="5549263" y="4076656"/>
+              <a:ext cx="4302229" cy="1937495"/>
             </a:xfrm>
             <a:prstGeom prst="rect">
               <a:avLst/>
@@ -9765,14 +10109,14 @@
         </p:sp>
         <p:sp>
           <p:nvSpPr>
-            <p:cNvPr id="168" name="rc168"/>
-            <p:cNvSpPr/>
-            <p:nvPr/>
-          </p:nvSpPr>
-          <p:spPr>
-            <a:xfrm>
-              <a:off x="5749445" y="1208398"/>
-              <a:ext cx="2016229" cy="225642"/>
+            <p:cNvPr id="176" name="rc176"/>
+            <p:cNvSpPr/>
+            <p:nvPr/>
+          </p:nvSpPr>
+          <p:spPr>
+            <a:xfrm>
+              <a:off x="1177445" y="3851014"/>
+              <a:ext cx="4302229" cy="225642"/>
             </a:xfrm>
             <a:prstGeom prst="rect">
               <a:avLst/>
@@ -9800,13 +10144,13 @@
         </p:sp>
         <p:sp>
           <p:nvSpPr>
-            <p:cNvPr id="169" name="tx169"/>
-            <p:cNvSpPr/>
-            <p:nvPr/>
-          </p:nvSpPr>
-          <p:spPr>
-            <a:xfrm>
-              <a:off x="6714067" y="1279527"/>
+            <p:cNvPr id="177" name="tx177"/>
+            <p:cNvSpPr/>
+            <p:nvPr/>
+          </p:nvSpPr>
+          <p:spPr>
+            <a:xfrm>
+              <a:off x="3285067" y="3922143"/>
               <a:ext cx="86985" cy="81691"/>
             </a:xfrm>
             <a:prstGeom prst="rect">
@@ -9846,14 +10190,14 @@
         </p:sp>
         <p:sp>
           <p:nvSpPr>
-            <p:cNvPr id="170" name="rc170"/>
-            <p:cNvSpPr/>
-            <p:nvPr/>
-          </p:nvSpPr>
-          <p:spPr>
-            <a:xfrm>
-              <a:off x="7835263" y="1208398"/>
-              <a:ext cx="2016229" cy="225642"/>
+            <p:cNvPr id="178" name="rc178"/>
+            <p:cNvSpPr/>
+            <p:nvPr/>
+          </p:nvSpPr>
+          <p:spPr>
+            <a:xfrm>
+              <a:off x="5549263" y="3851014"/>
+              <a:ext cx="4302229" cy="225642"/>
             </a:xfrm>
             <a:prstGeom prst="rect">
               <a:avLst/>
@@ -9881,13 +10225,13 @@
         </p:sp>
         <p:sp>
           <p:nvSpPr>
-            <p:cNvPr id="171" name="tx171"/>
-            <p:cNvSpPr/>
-            <p:nvPr/>
-          </p:nvSpPr>
-          <p:spPr>
-            <a:xfrm>
-              <a:off x="8799885" y="1280891"/>
+            <p:cNvPr id="179" name="tx179"/>
+            <p:cNvSpPr/>
+            <p:nvPr/>
+          </p:nvSpPr>
+          <p:spPr>
+            <a:xfrm>
+              <a:off x="7656885" y="3923507"/>
               <a:ext cx="86985" cy="80327"/>
             </a:xfrm>
             <a:prstGeom prst="rect">
@@ -9927,13 +10271,13 @@
         </p:sp>
         <p:sp>
           <p:nvSpPr>
-            <p:cNvPr id="172" name="pl172"/>
-            <p:cNvSpPr/>
-            <p:nvPr/>
-          </p:nvSpPr>
-          <p:spPr>
-            <a:xfrm>
-              <a:off x="6152784" y="6014152"/>
+            <p:cNvPr id="180" name="pl180"/>
+            <p:cNvSpPr/>
+            <p:nvPr/>
+          </p:nvSpPr>
+          <p:spPr>
+            <a:xfrm>
+              <a:off x="2038089" y="6014152"/>
               <a:ext cx="0" cy="34794"/>
             </a:xfrm>
             <a:custGeom>
@@ -9967,13 +10311,13 @@
         </p:sp>
         <p:sp>
           <p:nvSpPr>
-            <p:cNvPr id="173" name="pl173"/>
-            <p:cNvSpPr/>
-            <p:nvPr/>
-          </p:nvSpPr>
-          <p:spPr>
-            <a:xfrm>
-              <a:off x="6617996" y="6014152"/>
+            <p:cNvPr id="181" name="pl181"/>
+            <p:cNvSpPr/>
+            <p:nvPr/>
+          </p:nvSpPr>
+          <p:spPr>
+            <a:xfrm>
+              <a:off x="3030759" y="6014152"/>
               <a:ext cx="0" cy="34794"/>
             </a:xfrm>
             <a:custGeom>
@@ -10007,13 +10351,13 @@
         </p:sp>
         <p:sp>
           <p:nvSpPr>
-            <p:cNvPr id="174" name="pl174"/>
-            <p:cNvSpPr/>
-            <p:nvPr/>
-          </p:nvSpPr>
-          <p:spPr>
-            <a:xfrm>
-              <a:off x="7083208" y="6014152"/>
+            <p:cNvPr id="182" name="pl182"/>
+            <p:cNvSpPr/>
+            <p:nvPr/>
+          </p:nvSpPr>
+          <p:spPr>
+            <a:xfrm>
+              <a:off x="4023428" y="6014152"/>
               <a:ext cx="0" cy="34794"/>
             </a:xfrm>
             <a:custGeom>
@@ -10047,13 +10391,13 @@
         </p:sp>
         <p:sp>
           <p:nvSpPr>
-            <p:cNvPr id="175" name="pl175"/>
-            <p:cNvSpPr/>
-            <p:nvPr/>
-          </p:nvSpPr>
-          <p:spPr>
-            <a:xfrm>
-              <a:off x="7548420" y="6014152"/>
+            <p:cNvPr id="183" name="pl183"/>
+            <p:cNvSpPr/>
+            <p:nvPr/>
+          </p:nvSpPr>
+          <p:spPr>
+            <a:xfrm>
+              <a:off x="5016097" y="6014152"/>
               <a:ext cx="0" cy="34794"/>
             </a:xfrm>
             <a:custGeom>
@@ -10087,13 +10431,13 @@
         </p:sp>
         <p:sp>
           <p:nvSpPr>
-            <p:cNvPr id="176" name="tx176"/>
-            <p:cNvSpPr/>
-            <p:nvPr/>
-          </p:nvSpPr>
-          <p:spPr>
-            <a:xfrm>
-              <a:off x="6044025" y="6075090"/>
+            <p:cNvPr id="184" name="tx184"/>
+            <p:cNvSpPr/>
+            <p:nvPr/>
+          </p:nvSpPr>
+          <p:spPr>
+            <a:xfrm>
+              <a:off x="1929331" y="6075090"/>
               <a:ext cx="217517" cy="81691"/>
             </a:xfrm>
             <a:prstGeom prst="rect">
@@ -10133,13 +10477,13 @@
         </p:sp>
         <p:sp>
           <p:nvSpPr>
-            <p:cNvPr id="177" name="tx177"/>
-            <p:cNvSpPr/>
-            <p:nvPr/>
-          </p:nvSpPr>
-          <p:spPr>
-            <a:xfrm>
-              <a:off x="6509237" y="6075090"/>
+            <p:cNvPr id="185" name="tx185"/>
+            <p:cNvSpPr/>
+            <p:nvPr/>
+          </p:nvSpPr>
+          <p:spPr>
+            <a:xfrm>
+              <a:off x="2922000" y="6075090"/>
               <a:ext cx="217517" cy="81691"/>
             </a:xfrm>
             <a:prstGeom prst="rect">
@@ -10179,13 +10523,13 @@
         </p:sp>
         <p:sp>
           <p:nvSpPr>
-            <p:cNvPr id="178" name="tx178"/>
-            <p:cNvSpPr/>
-            <p:nvPr/>
-          </p:nvSpPr>
-          <p:spPr>
-            <a:xfrm>
-              <a:off x="6974449" y="6075090"/>
+            <p:cNvPr id="186" name="tx186"/>
+            <p:cNvSpPr/>
+            <p:nvPr/>
+          </p:nvSpPr>
+          <p:spPr>
+            <a:xfrm>
+              <a:off x="3914669" y="6075090"/>
               <a:ext cx="217517" cy="81691"/>
             </a:xfrm>
             <a:prstGeom prst="rect">
@@ -10225,13 +10569,13 @@
         </p:sp>
         <p:sp>
           <p:nvSpPr>
-            <p:cNvPr id="179" name="tx179"/>
-            <p:cNvSpPr/>
-            <p:nvPr/>
-          </p:nvSpPr>
-          <p:spPr>
-            <a:xfrm>
-              <a:off x="7439661" y="6075090"/>
+            <p:cNvPr id="187" name="tx187"/>
+            <p:cNvSpPr/>
+            <p:nvPr/>
+          </p:nvSpPr>
+          <p:spPr>
+            <a:xfrm>
+              <a:off x="4907339" y="6075090"/>
               <a:ext cx="217517" cy="81691"/>
             </a:xfrm>
             <a:prstGeom prst="rect">
@@ -10271,13 +10615,13 @@
         </p:sp>
         <p:sp>
           <p:nvSpPr>
-            <p:cNvPr id="180" name="pl180"/>
-            <p:cNvSpPr/>
-            <p:nvPr/>
-          </p:nvSpPr>
-          <p:spPr>
-            <a:xfrm>
-              <a:off x="8238602" y="6014152"/>
+            <p:cNvPr id="188" name="pl188"/>
+            <p:cNvSpPr/>
+            <p:nvPr/>
+          </p:nvSpPr>
+          <p:spPr>
+            <a:xfrm>
+              <a:off x="6409907" y="6014152"/>
               <a:ext cx="0" cy="34794"/>
             </a:xfrm>
             <a:custGeom>
@@ -10311,13 +10655,13 @@
         </p:sp>
         <p:sp>
           <p:nvSpPr>
-            <p:cNvPr id="181" name="pl181"/>
-            <p:cNvSpPr/>
-            <p:nvPr/>
-          </p:nvSpPr>
-          <p:spPr>
-            <a:xfrm>
-              <a:off x="8703814" y="6014152"/>
+            <p:cNvPr id="189" name="pl189"/>
+            <p:cNvSpPr/>
+            <p:nvPr/>
+          </p:nvSpPr>
+          <p:spPr>
+            <a:xfrm>
+              <a:off x="7402577" y="6014152"/>
               <a:ext cx="0" cy="34794"/>
             </a:xfrm>
             <a:custGeom>
@@ -10351,13 +10695,13 @@
         </p:sp>
         <p:sp>
           <p:nvSpPr>
-            <p:cNvPr id="182" name="pl182"/>
-            <p:cNvSpPr/>
-            <p:nvPr/>
-          </p:nvSpPr>
-          <p:spPr>
-            <a:xfrm>
-              <a:off x="9169026" y="6014152"/>
+            <p:cNvPr id="190" name="pl190"/>
+            <p:cNvSpPr/>
+            <p:nvPr/>
+          </p:nvSpPr>
+          <p:spPr>
+            <a:xfrm>
+              <a:off x="8395246" y="6014152"/>
               <a:ext cx="0" cy="34794"/>
             </a:xfrm>
             <a:custGeom>
@@ -10391,13 +10735,13 @@
         </p:sp>
         <p:sp>
           <p:nvSpPr>
-            <p:cNvPr id="183" name="pl183"/>
-            <p:cNvSpPr/>
-            <p:nvPr/>
-          </p:nvSpPr>
-          <p:spPr>
-            <a:xfrm>
-              <a:off x="9634238" y="6014152"/>
+            <p:cNvPr id="191" name="pl191"/>
+            <p:cNvSpPr/>
+            <p:nvPr/>
+          </p:nvSpPr>
+          <p:spPr>
+            <a:xfrm>
+              <a:off x="9387915" y="6014152"/>
               <a:ext cx="0" cy="34794"/>
             </a:xfrm>
             <a:custGeom>
@@ -10431,13 +10775,13 @@
         </p:sp>
         <p:sp>
           <p:nvSpPr>
-            <p:cNvPr id="184" name="tx184"/>
-            <p:cNvSpPr/>
-            <p:nvPr/>
-          </p:nvSpPr>
-          <p:spPr>
-            <a:xfrm>
-              <a:off x="8129843" y="6075090"/>
+            <p:cNvPr id="192" name="tx192"/>
+            <p:cNvSpPr/>
+            <p:nvPr/>
+          </p:nvSpPr>
+          <p:spPr>
+            <a:xfrm>
+              <a:off x="6301149" y="6075090"/>
               <a:ext cx="217517" cy="81691"/>
             </a:xfrm>
             <a:prstGeom prst="rect">
@@ -10477,13 +10821,13 @@
         </p:sp>
         <p:sp>
           <p:nvSpPr>
-            <p:cNvPr id="185" name="tx185"/>
-            <p:cNvSpPr/>
-            <p:nvPr/>
-          </p:nvSpPr>
-          <p:spPr>
-            <a:xfrm>
-              <a:off x="8595055" y="6075090"/>
+            <p:cNvPr id="193" name="tx193"/>
+            <p:cNvSpPr/>
+            <p:nvPr/>
+          </p:nvSpPr>
+          <p:spPr>
+            <a:xfrm>
+              <a:off x="7293818" y="6075090"/>
               <a:ext cx="217517" cy="81691"/>
             </a:xfrm>
             <a:prstGeom prst="rect">
@@ -10523,13 +10867,13 @@
         </p:sp>
         <p:sp>
           <p:nvSpPr>
-            <p:cNvPr id="186" name="tx186"/>
-            <p:cNvSpPr/>
-            <p:nvPr/>
-          </p:nvSpPr>
-          <p:spPr>
-            <a:xfrm>
-              <a:off x="9060267" y="6075090"/>
+            <p:cNvPr id="194" name="tx194"/>
+            <p:cNvSpPr/>
+            <p:nvPr/>
+          </p:nvSpPr>
+          <p:spPr>
+            <a:xfrm>
+              <a:off x="8286487" y="6075090"/>
               <a:ext cx="217517" cy="81691"/>
             </a:xfrm>
             <a:prstGeom prst="rect">
@@ -10569,13 +10913,13 @@
         </p:sp>
         <p:sp>
           <p:nvSpPr>
-            <p:cNvPr id="187" name="tx187"/>
-            <p:cNvSpPr/>
-            <p:nvPr/>
-          </p:nvSpPr>
-          <p:spPr>
-            <a:xfrm>
-              <a:off x="9525479" y="6075090"/>
+            <p:cNvPr id="195" name="tx195"/>
+            <p:cNvSpPr/>
+            <p:nvPr/>
+          </p:nvSpPr>
+          <p:spPr>
+            <a:xfrm>
+              <a:off x="9279157" y="6075090"/>
               <a:ext cx="217517" cy="81691"/>
             </a:xfrm>
             <a:prstGeom prst="rect">
@@ -10615,13 +10959,13 @@
         </p:sp>
         <p:sp>
           <p:nvSpPr>
-            <p:cNvPr id="188" name="tx188"/>
-            <p:cNvSpPr/>
-            <p:nvPr/>
-          </p:nvSpPr>
-          <p:spPr>
-            <a:xfrm>
-              <a:off x="5587442" y="5488109"/>
+            <p:cNvPr id="196" name="tx196"/>
+            <p:cNvSpPr/>
+            <p:nvPr/>
+          </p:nvSpPr>
+          <p:spPr>
+            <a:xfrm>
+              <a:off x="1015442" y="5768387"/>
               <a:ext cx="99372" cy="80272"/>
             </a:xfrm>
             <a:prstGeom prst="rect">
@@ -10661,13 +11005,13 @@
         </p:sp>
         <p:sp>
           <p:nvSpPr>
-            <p:cNvPr id="189" name="tx189"/>
-            <p:cNvSpPr/>
-            <p:nvPr/>
-          </p:nvSpPr>
-          <p:spPr>
-            <a:xfrm>
-              <a:off x="5624659" y="4098778"/>
+            <p:cNvPr id="197" name="tx197"/>
+            <p:cNvSpPr/>
+            <p:nvPr/>
+          </p:nvSpPr>
+          <p:spPr>
+            <a:xfrm>
+              <a:off x="1052659" y="5179848"/>
               <a:ext cx="62155" cy="81691"/>
             </a:xfrm>
             <a:prstGeom prst="rect">
@@ -10707,13 +11051,13 @@
         </p:sp>
         <p:sp>
           <p:nvSpPr>
-            <p:cNvPr id="190" name="tx190"/>
-            <p:cNvSpPr/>
-            <p:nvPr/>
-          </p:nvSpPr>
-          <p:spPr>
-            <a:xfrm>
-              <a:off x="5624659" y="2712284"/>
+            <p:cNvPr id="198" name="tx198"/>
+            <p:cNvSpPr/>
+            <p:nvPr/>
+          </p:nvSpPr>
+          <p:spPr>
+            <a:xfrm>
+              <a:off x="1052659" y="4594147"/>
               <a:ext cx="62155" cy="80272"/>
             </a:xfrm>
             <a:prstGeom prst="rect">
@@ -10753,13 +11097,13 @@
         </p:sp>
         <p:sp>
           <p:nvSpPr>
-            <p:cNvPr id="191" name="pl191"/>
-            <p:cNvSpPr/>
-            <p:nvPr/>
-          </p:nvSpPr>
-          <p:spPr>
-            <a:xfrm>
-              <a:off x="5714650" y="5528382"/>
+            <p:cNvPr id="199" name="pl199"/>
+            <p:cNvSpPr/>
+            <p:nvPr/>
+          </p:nvSpPr>
+          <p:spPr>
+            <a:xfrm>
+              <a:off x="1142650" y="5808660"/>
               <a:ext cx="34794" cy="0"/>
             </a:xfrm>
             <a:custGeom>
@@ -10793,13 +11137,13 @@
         </p:sp>
         <p:sp>
           <p:nvSpPr>
-            <p:cNvPr id="192" name="pl192"/>
-            <p:cNvSpPr/>
-            <p:nvPr/>
-          </p:nvSpPr>
-          <p:spPr>
-            <a:xfrm>
-              <a:off x="5714650" y="4140470"/>
+            <p:cNvPr id="200" name="pl200"/>
+            <p:cNvSpPr/>
+            <p:nvPr/>
+          </p:nvSpPr>
+          <p:spPr>
+            <a:xfrm>
+              <a:off x="1142650" y="5221540"/>
               <a:ext cx="34794" cy="0"/>
             </a:xfrm>
             <a:custGeom>
@@ -10833,13 +11177,13 @@
         </p:sp>
         <p:sp>
           <p:nvSpPr>
-            <p:cNvPr id="193" name="pl193"/>
-            <p:cNvSpPr/>
-            <p:nvPr/>
-          </p:nvSpPr>
-          <p:spPr>
-            <a:xfrm>
-              <a:off x="5714650" y="2752557"/>
+            <p:cNvPr id="201" name="pl201"/>
+            <p:cNvSpPr/>
+            <p:nvPr/>
+          </p:nvSpPr>
+          <p:spPr>
+            <a:xfrm>
+              <a:off x="1142650" y="4634420"/>
               <a:ext cx="34794" cy="0"/>
             </a:xfrm>
             <a:custGeom>
@@ -10873,13 +11217,13 @@
         </p:sp>
         <p:sp>
           <p:nvSpPr>
-            <p:cNvPr id="194" name="tx194"/>
-            <p:cNvSpPr/>
-            <p:nvPr/>
-          </p:nvSpPr>
-          <p:spPr>
-            <a:xfrm>
-              <a:off x="6818169" y="6224239"/>
+            <p:cNvPr id="202" name="tx202"/>
+            <p:cNvSpPr/>
+            <p:nvPr/>
+          </p:nvSpPr>
+          <p:spPr>
+            <a:xfrm>
+              <a:off x="4532169" y="6224239"/>
               <a:ext cx="1964599" cy="101637"/>
             </a:xfrm>
             <a:prstGeom prst="rect">
@@ -10919,13 +11263,13 @@
         </p:sp>
         <p:sp>
           <p:nvSpPr>
-            <p:cNvPr id="195" name="tx195"/>
+            <p:cNvPr id="203" name="tx203"/>
             <p:cNvSpPr/>
             <p:nvPr/>
           </p:nvSpPr>
           <p:spPr>
             <a:xfrm rot="-5400000">
-              <a:off x="4825047" y="3659396"/>
+              <a:off x="253047" y="4980704"/>
               <a:ext cx="1257845" cy="129399"/>
             </a:xfrm>
             <a:prstGeom prst="rect">
